--- a/Testsúlycsökkentő gyógyszeres terápiák.pptx
+++ b/Testsúlycsökkentő gyógyszeres terápiák.pptx
@@ -7,10 +7,11 @@
   <p:sldIdLst>
     <p:sldId id="256" r:id="rId2"/>
     <p:sldId id="257" r:id="rId3"/>
-    <p:sldId id="259" r:id="rId4"/>
-    <p:sldId id="260" r:id="rId5"/>
-    <p:sldId id="258" r:id="rId6"/>
-    <p:sldId id="261" r:id="rId7"/>
+    <p:sldId id="262" r:id="rId4"/>
+    <p:sldId id="259" r:id="rId5"/>
+    <p:sldId id="260" r:id="rId6"/>
+    <p:sldId id="258" r:id="rId7"/>
+    <p:sldId id="261" r:id="rId8"/>
   </p:sldIdLst>
   <p:sldSz cx="12192000" cy="6858000"/>
   <p:notesSz cx="6858000" cy="9144000"/>
@@ -109,6 +110,11 @@
       </a:defRPr>
     </a:lvl9pPr>
   </p:defaultTextStyle>
+  <p:extLst>
+    <p:ext uri="{EFAFB233-063F-42B5-8137-9DF3F51BA10A}">
+      <p15:sldGuideLst xmlns:p15="http://schemas.microsoft.com/office/powerpoint/2012/main"/>
+    </p:ext>
+  </p:extLst>
 </p:presentation>
 </file>
 
@@ -260,7 +266,7 @@
           <a:lstStyle/>
           <a:p>
             <a:fld id="{8C9917DF-FD8E-5A4B-A429-071A0169D668}" type="datetimeFigureOut">
-              <a:t>2026. 04. 16.</a:t>
+              <a:t>2026. 04. 23.</a:t>
             </a:fld>
             <a:endParaRPr lang="en-HU"/>
           </a:p>
@@ -458,7 +464,7 @@
           <a:lstStyle/>
           <a:p>
             <a:fld id="{8C9917DF-FD8E-5A4B-A429-071A0169D668}" type="datetimeFigureOut">
-              <a:t>2026. 04. 16.</a:t>
+              <a:t>2026. 04. 23.</a:t>
             </a:fld>
             <a:endParaRPr lang="en-HU"/>
           </a:p>
@@ -666,7 +672,7 @@
           <a:lstStyle/>
           <a:p>
             <a:fld id="{8C9917DF-FD8E-5A4B-A429-071A0169D668}" type="datetimeFigureOut">
-              <a:t>2026. 04. 16.</a:t>
+              <a:t>2026. 04. 23.</a:t>
             </a:fld>
             <a:endParaRPr lang="en-HU"/>
           </a:p>
@@ -864,7 +870,7 @@
           <a:lstStyle/>
           <a:p>
             <a:fld id="{8C9917DF-FD8E-5A4B-A429-071A0169D668}" type="datetimeFigureOut">
-              <a:t>2026. 04. 16.</a:t>
+              <a:t>2026. 04. 23.</a:t>
             </a:fld>
             <a:endParaRPr lang="en-HU"/>
           </a:p>
@@ -1138,7 +1144,7 @@
           <a:lstStyle/>
           <a:p>
             <a:fld id="{8C9917DF-FD8E-5A4B-A429-071A0169D668}" type="datetimeFigureOut">
-              <a:t>2026. 04. 16.</a:t>
+              <a:t>2026. 04. 23.</a:t>
             </a:fld>
             <a:endParaRPr lang="en-HU"/>
           </a:p>
@@ -1404,7 +1410,7 @@
           <a:lstStyle/>
           <a:p>
             <a:fld id="{8C9917DF-FD8E-5A4B-A429-071A0169D668}" type="datetimeFigureOut">
-              <a:t>2026. 04. 16.</a:t>
+              <a:t>2026. 04. 23.</a:t>
             </a:fld>
             <a:endParaRPr lang="en-HU"/>
           </a:p>
@@ -1817,7 +1823,7 @@
           <a:lstStyle/>
           <a:p>
             <a:fld id="{8C9917DF-FD8E-5A4B-A429-071A0169D668}" type="datetimeFigureOut">
-              <a:t>2026. 04. 16.</a:t>
+              <a:t>2026. 04. 23.</a:t>
             </a:fld>
             <a:endParaRPr lang="en-HU"/>
           </a:p>
@@ -1957,7 +1963,7 @@
           <a:lstStyle/>
           <a:p>
             <a:fld id="{8C9917DF-FD8E-5A4B-A429-071A0169D668}" type="datetimeFigureOut">
-              <a:t>2026. 04. 16.</a:t>
+              <a:t>2026. 04. 23.</a:t>
             </a:fld>
             <a:endParaRPr lang="en-HU"/>
           </a:p>
@@ -2068,7 +2074,7 @@
           <a:lstStyle/>
           <a:p>
             <a:fld id="{8C9917DF-FD8E-5A4B-A429-071A0169D668}" type="datetimeFigureOut">
-              <a:t>2026. 04. 16.</a:t>
+              <a:t>2026. 04. 23.</a:t>
             </a:fld>
             <a:endParaRPr lang="en-HU"/>
           </a:p>
@@ -2379,7 +2385,7 @@
           <a:lstStyle/>
           <a:p>
             <a:fld id="{8C9917DF-FD8E-5A4B-A429-071A0169D668}" type="datetimeFigureOut">
-              <a:t>2026. 04. 16.</a:t>
+              <a:t>2026. 04. 23.</a:t>
             </a:fld>
             <a:endParaRPr lang="en-HU"/>
           </a:p>
@@ -2666,7 +2672,7 @@
           <a:lstStyle/>
           <a:p>
             <a:fld id="{8C9917DF-FD8E-5A4B-A429-071A0169D668}" type="datetimeFigureOut">
-              <a:t>2026. 04. 16.</a:t>
+              <a:t>2026. 04. 23.</a:t>
             </a:fld>
             <a:endParaRPr lang="en-HU"/>
           </a:p>
@@ -2907,7 +2913,7 @@
           </a:lstStyle>
           <a:p>
             <a:fld id="{8C9917DF-FD8E-5A4B-A429-071A0169D668}" type="datetimeFigureOut">
-              <a:t>2026. 04. 16.</a:t>
+              <a:t>2026. 04. 23.</a:t>
             </a:fld>
             <a:endParaRPr lang="en-HU"/>
           </a:p>
@@ -3523,7 +3529,7 @@
           <p:cNvPr id="2" name="Title 1">
             <a:extLst>
               <a:ext uri="{FF2B5EF4-FFF2-40B4-BE49-F238E27FC236}">
-                <a16:creationId xmlns:a16="http://schemas.microsoft.com/office/drawing/2014/main" id="{5172F720-8A5B-06E0-4FF0-415FF29DEB31}"/>
+                <a16:creationId xmlns:a16="http://schemas.microsoft.com/office/drawing/2014/main" id="{9101AFE8-ABD4-BCF2-2F0B-4DDCAAA59397}"/>
               </a:ext>
             </a:extLst>
           </p:cNvPr>
@@ -3540,10 +3546,9 @@
           <a:lstStyle/>
           <a:p>
             <a:r>
-              <a:rPr lang="hu-HU" b="1"/>
-              <a:t>Gyakoribb mellékhatások</a:t>
-            </a:r>
-            <a:endParaRPr lang="en-HU"/>
+              <a:rPr lang="en-HU" b="1"/>
+              <a:t>Ellenjavallatok</a:t>
+            </a:r>
           </a:p>
         </p:txBody>
       </p:sp>
@@ -3552,7 +3557,7 @@
           <p:cNvPr id="3" name="Content Placeholder 2">
             <a:extLst>
               <a:ext uri="{FF2B5EF4-FFF2-40B4-BE49-F238E27FC236}">
-                <a16:creationId xmlns:a16="http://schemas.microsoft.com/office/drawing/2014/main" id="{FC7E3A50-1EEF-607B-03C3-56B25C18547A}"/>
+                <a16:creationId xmlns:a16="http://schemas.microsoft.com/office/drawing/2014/main" id="{4022614A-23D0-B275-4015-739224BB73AA}"/>
               </a:ext>
             </a:extLst>
           </p:cNvPr>
@@ -3569,66 +3574,6 @@
             <a:normAutofit lnSpcReduction="10000"/>
           </a:bodyPr>
           <a:lstStyle/>
-          <a:p>
-            <a:pPr marL="0" indent="0">
-              <a:buNone/>
-            </a:pPr>
-            <a:r>
-              <a:rPr lang="en-HU"/>
-              <a:t>Hányinger, hányás</a:t>
-            </a:r>
-          </a:p>
-          <a:p>
-            <a:pPr marL="0" indent="0">
-              <a:buNone/>
-            </a:pPr>
-            <a:r>
-              <a:rPr lang="en-HU"/>
-              <a:t>Hasmenés vagy székrekedés</a:t>
-            </a:r>
-          </a:p>
-          <a:p>
-            <a:pPr marL="0" indent="0">
-              <a:buNone/>
-            </a:pPr>
-            <a:r>
-              <a:rPr lang="en-HU"/>
-              <a:t>Puffadás vagy teltségérzés</a:t>
-            </a:r>
-          </a:p>
-          <a:p>
-            <a:pPr marL="0" indent="0">
-              <a:buNone/>
-            </a:pPr>
-            <a:r>
-              <a:rPr lang="en-HU"/>
-              <a:t>Fáradtság</a:t>
-            </a:r>
-          </a:p>
-          <a:p>
-            <a:pPr marL="0" indent="0">
-              <a:buNone/>
-            </a:pPr>
-            <a:r>
-              <a:rPr lang="en-HU"/>
-              <a:t>Hajhullás</a:t>
-            </a:r>
-          </a:p>
-          <a:p>
-            <a:pPr marL="0" indent="0">
-              <a:buNone/>
-            </a:pPr>
-            <a:endParaRPr lang="en-HU"/>
-          </a:p>
-          <a:p>
-            <a:pPr marL="0" indent="0">
-              <a:buNone/>
-            </a:pPr>
-            <a:r>
-              <a:rPr lang="en-HU" b="1"/>
-              <a:t>Ritka, de fontos kockázatok</a:t>
-            </a:r>
-          </a:p>
           <a:p>
             <a:pPr>
               <a:buFontTx/>
@@ -3636,7 +3581,7 @@
             </a:pPr>
             <a:r>
               <a:rPr lang="en-HU"/>
-              <a:t>hasnyálmirigy gyulladás – erős, övszerű hasi fájdalom hányással</a:t>
+              <a:t>terhesség, szoptatás</a:t>
             </a:r>
           </a:p>
           <a:p>
@@ -3646,15 +3591,76 @@
             </a:pPr>
             <a:r>
               <a:rPr lang="en-HU"/>
+              <a:t>bizonyos típusú pajzsmirigyrákok</a:t>
+            </a:r>
+          </a:p>
+          <a:p>
+            <a:pPr>
+              <a:buFontTx/>
+              <a:buChar char="-"/>
+            </a:pPr>
+            <a:r>
+              <a:rPr lang="en-HU"/>
+              <a:t>ún. MEN-2 szindróma (öröklődő pajzsmirigy + mellékvese daganat)</a:t>
+            </a:r>
+          </a:p>
+          <a:p>
+            <a:pPr>
+              <a:buFontTx/>
+              <a:buChar char="-"/>
+            </a:pPr>
+            <a:r>
+              <a:rPr lang="en-HU"/>
+              <a:t>bizonyos típusú hasnyálmirigy gyulladás az előzményben</a:t>
+            </a:r>
+          </a:p>
+          <a:p>
+            <a:pPr marL="0" indent="0">
+              <a:buNone/>
+            </a:pPr>
+            <a:endParaRPr lang="en-HU" b="1"/>
+          </a:p>
+          <a:p>
+            <a:pPr marL="0" indent="0">
+              <a:buNone/>
+            </a:pPr>
+            <a:r>
+              <a:rPr lang="en-HU" b="1"/>
+              <a:t>Ritka, de fontos kezelés alatti kockázatok</a:t>
+            </a:r>
+          </a:p>
+          <a:p>
+            <a:pPr>
+              <a:buFontTx/>
+              <a:buChar char="-"/>
+            </a:pPr>
+            <a:r>
+              <a:rPr lang="en-HU"/>
+              <a:t>hasnyálmirigy gyulladás – erős, övszerű hasi fájdalom hányással</a:t>
+            </a:r>
+          </a:p>
+          <a:p>
+            <a:pPr>
+              <a:buFontTx/>
+              <a:buChar char="-"/>
+            </a:pPr>
+            <a:r>
+              <a:rPr lang="en-HU"/>
               <a:t>egyoldali fájdalmatlan látásvesztés</a:t>
             </a:r>
+          </a:p>
+          <a:p>
+            <a:pPr marL="0" indent="0">
+              <a:buNone/>
+            </a:pPr>
+            <a:endParaRPr lang="en-HU"/>
           </a:p>
         </p:txBody>
       </p:sp>
     </p:spTree>
     <p:extLst>
       <p:ext uri="{BB962C8B-B14F-4D97-AF65-F5344CB8AC3E}">
-        <p14:creationId xmlns:p14="http://schemas.microsoft.com/office/powerpoint/2010/main" val="1797897794"/>
+        <p14:creationId xmlns:p14="http://schemas.microsoft.com/office/powerpoint/2010/main" val="1405731578"/>
       </p:ext>
     </p:extLst>
   </p:cSld>
@@ -3686,7 +3692,7 @@
           <p:cNvPr id="2" name="Title 1">
             <a:extLst>
               <a:ext uri="{FF2B5EF4-FFF2-40B4-BE49-F238E27FC236}">
-                <a16:creationId xmlns:a16="http://schemas.microsoft.com/office/drawing/2014/main" id="{CAE58BA9-93C5-3F91-FA1C-6F665CC15BCF}"/>
+                <a16:creationId xmlns:a16="http://schemas.microsoft.com/office/drawing/2014/main" id="{5172F720-8A5B-06E0-4FF0-415FF29DEB31}"/>
               </a:ext>
             </a:extLst>
           </p:cNvPr>
@@ -3703,9 +3709,10 @@
           <a:lstStyle/>
           <a:p>
             <a:r>
-              <a:rPr lang="en-HU" b="1"/>
-              <a:t>Mire kell figyelni?</a:t>
-            </a:r>
+              <a:rPr lang="hu-HU" b="1"/>
+              <a:t>Gyakoribb mellékhatások</a:t>
+            </a:r>
+            <a:endParaRPr lang="en-HU"/>
           </a:p>
         </p:txBody>
       </p:sp>
@@ -3714,7 +3721,7 @@
           <p:cNvPr id="3" name="Content Placeholder 2">
             <a:extLst>
               <a:ext uri="{FF2B5EF4-FFF2-40B4-BE49-F238E27FC236}">
-                <a16:creationId xmlns:a16="http://schemas.microsoft.com/office/drawing/2014/main" id="{49DC2C35-5DC2-1029-B05F-4150FF524E45}"/>
+                <a16:creationId xmlns:a16="http://schemas.microsoft.com/office/drawing/2014/main" id="{FC7E3A50-1EEF-607B-03C3-56B25C18547A}"/>
               </a:ext>
             </a:extLst>
           </p:cNvPr>
@@ -3728,71 +3735,58 @@
         <p:spPr/>
         <p:txBody>
           <a:bodyPr>
-            <a:normAutofit fontScale="92500" lnSpcReduction="10000"/>
+            <a:normAutofit/>
           </a:bodyPr>
           <a:lstStyle/>
           <a:p>
+            <a:pPr marL="0" indent="0">
+              <a:buNone/>
+            </a:pPr>
+            <a:endParaRPr lang="en-HU"/>
+          </a:p>
+          <a:p>
+            <a:pPr marL="0" indent="0">
+              <a:buNone/>
+            </a:pPr>
             <a:r>
               <a:rPr lang="en-HU"/>
-              <a:t>nagy volumenű étkezés, alkoholfogyasztás ne legyen</a:t>
-            </a:r>
-          </a:p>
-          <a:p>
+              <a:t>Hányinger, hányás</a:t>
+            </a:r>
+          </a:p>
+          <a:p>
+            <a:pPr marL="0" indent="0">
+              <a:buNone/>
+            </a:pPr>
             <a:r>
               <a:rPr lang="en-HU"/>
-              <a:t>megfelelő folyadékfogyasztásra figyeljen</a:t>
-            </a:r>
-          </a:p>
-          <a:p>
-            <a:endParaRPr lang="en-HU"/>
-          </a:p>
-          <a:p>
+              <a:t>Hasmenés vagy székrekedés</a:t>
+            </a:r>
+          </a:p>
+          <a:p>
+            <a:pPr marL="0" indent="0">
+              <a:buNone/>
+            </a:pPr>
             <a:r>
               <a:rPr lang="en-HU"/>
-              <a:t>életmód, tréning, fehérjebevitel ugyanúgy fontos az izomvesztés elkerülésére</a:t>
-            </a:r>
-          </a:p>
-          <a:p>
-            <a:endParaRPr lang="en-HU"/>
+              <a:t>Puffadás vagy teltségérzés</a:t>
+            </a:r>
           </a:p>
           <a:p>
             <a:pPr marL="0" indent="0">
               <a:buNone/>
             </a:pPr>
             <a:r>
-              <a:rPr lang="en-HU" sz="3000" b="1"/>
-              <a:t>ELLENJAVALLATOK</a:t>
-            </a:r>
-            <a:endParaRPr lang="en-HU" b="1"/>
-          </a:p>
-          <a:p>
-            <a:pPr>
-              <a:buFontTx/>
-              <a:buChar char="-"/>
+              <a:rPr lang="en-HU"/>
+              <a:t>Fáradtság</a:t>
+            </a:r>
+          </a:p>
+          <a:p>
+            <a:pPr marL="0" indent="0">
+              <a:buNone/>
             </a:pPr>
             <a:r>
               <a:rPr lang="en-HU"/>
-              <a:t>terhesség, szoptatás</a:t>
-            </a:r>
-          </a:p>
-          <a:p>
-            <a:pPr>
-              <a:buFontTx/>
-              <a:buChar char="-"/>
-            </a:pPr>
-            <a:r>
-              <a:rPr lang="en-HU"/>
-              <a:t>bizonyos típusú pajzsmirigyrákok, ún. MEN-2 szindróma</a:t>
-            </a:r>
-          </a:p>
-          <a:p>
-            <a:pPr>
-              <a:buFontTx/>
-              <a:buChar char="-"/>
-            </a:pPr>
-            <a:r>
-              <a:rPr lang="en-HU"/>
-              <a:t>bizonyos típusú hasnyálmirigy gyulladás az előzményben</a:t>
+              <a:t>Hajhullás</a:t>
             </a:r>
           </a:p>
         </p:txBody>
@@ -3800,7 +3794,7 @@
     </p:spTree>
     <p:extLst>
       <p:ext uri="{BB962C8B-B14F-4D97-AF65-F5344CB8AC3E}">
-        <p14:creationId xmlns:p14="http://schemas.microsoft.com/office/powerpoint/2010/main" val="3775309155"/>
+        <p14:creationId xmlns:p14="http://schemas.microsoft.com/office/powerpoint/2010/main" val="1797897794"/>
       </p:ext>
     </p:extLst>
   </p:cSld>
@@ -3832,6 +3826,115 @@
           <p:cNvPr id="2" name="Title 1">
             <a:extLst>
               <a:ext uri="{FF2B5EF4-FFF2-40B4-BE49-F238E27FC236}">
+                <a16:creationId xmlns:a16="http://schemas.microsoft.com/office/drawing/2014/main" id="{CAE58BA9-93C5-3F91-FA1C-6F665CC15BCF}"/>
+              </a:ext>
+            </a:extLst>
+          </p:cNvPr>
+          <p:cNvSpPr>
+            <a:spLocks noGrp="1"/>
+          </p:cNvSpPr>
+          <p:nvPr>
+            <p:ph type="title"/>
+          </p:nvPr>
+        </p:nvSpPr>
+        <p:spPr/>
+        <p:txBody>
+          <a:bodyPr/>
+          <a:lstStyle/>
+          <a:p>
+            <a:r>
+              <a:rPr lang="en-HU" b="1"/>
+              <a:t>Mire kell figyelni?</a:t>
+            </a:r>
+          </a:p>
+        </p:txBody>
+      </p:sp>
+      <p:sp>
+        <p:nvSpPr>
+          <p:cNvPr id="3" name="Content Placeholder 2">
+            <a:extLst>
+              <a:ext uri="{FF2B5EF4-FFF2-40B4-BE49-F238E27FC236}">
+                <a16:creationId xmlns:a16="http://schemas.microsoft.com/office/drawing/2014/main" id="{49DC2C35-5DC2-1029-B05F-4150FF524E45}"/>
+              </a:ext>
+            </a:extLst>
+          </p:cNvPr>
+          <p:cNvSpPr>
+            <a:spLocks noGrp="1"/>
+          </p:cNvSpPr>
+          <p:nvPr>
+            <p:ph idx="1"/>
+          </p:nvPr>
+        </p:nvSpPr>
+        <p:spPr/>
+        <p:txBody>
+          <a:bodyPr>
+            <a:normAutofit/>
+          </a:bodyPr>
+          <a:lstStyle/>
+          <a:p>
+            <a:endParaRPr lang="en-HU"/>
+          </a:p>
+          <a:p>
+            <a:endParaRPr lang="en-HU"/>
+          </a:p>
+          <a:p>
+            <a:r>
+              <a:rPr lang="en-HU"/>
+              <a:t>nagy volumenű étkezés, alkoholfogyasztás ne legyen</a:t>
+            </a:r>
+          </a:p>
+          <a:p>
+            <a:r>
+              <a:rPr lang="en-HU"/>
+              <a:t>megfelelő folyadékfogyasztásra figyeljen</a:t>
+            </a:r>
+          </a:p>
+          <a:p>
+            <a:endParaRPr lang="en-HU"/>
+          </a:p>
+          <a:p>
+            <a:r>
+              <a:rPr lang="en-HU"/>
+              <a:t>életmód, tréning, fehérjebevitel ugyanúgy fontos az izomvesztés elkerülésére</a:t>
+            </a:r>
+          </a:p>
+        </p:txBody>
+      </p:sp>
+    </p:spTree>
+    <p:extLst>
+      <p:ext uri="{BB962C8B-B14F-4D97-AF65-F5344CB8AC3E}">
+        <p14:creationId xmlns:p14="http://schemas.microsoft.com/office/powerpoint/2010/main" val="3775309155"/>
+      </p:ext>
+    </p:extLst>
+  </p:cSld>
+  <p:clrMapOvr>
+    <a:masterClrMapping/>
+  </p:clrMapOvr>
+</p:sld>
+</file>
+
+<file path=ppt/slides/slide6.xml><?xml version="1.0" encoding="utf-8"?>
+<p:sld xmlns:a="http://schemas.openxmlformats.org/drawingml/2006/main" xmlns:r="http://schemas.openxmlformats.org/officeDocument/2006/relationships" xmlns:p="http://schemas.openxmlformats.org/presentationml/2006/main">
+  <p:cSld>
+    <p:spTree>
+      <p:nvGrpSpPr>
+        <p:cNvPr id="1" name=""/>
+        <p:cNvGrpSpPr/>
+        <p:nvPr/>
+      </p:nvGrpSpPr>
+      <p:grpSpPr>
+        <a:xfrm>
+          <a:off x="0" y="0"/>
+          <a:ext cx="0" cy="0"/>
+          <a:chOff x="0" y="0"/>
+          <a:chExt cx="0" cy="0"/>
+        </a:xfrm>
+      </p:grpSpPr>
+      <p:sp>
+        <p:nvSpPr>
+          <p:cNvPr id="2" name="Title 1">
+            <a:extLst>
+              <a:ext uri="{FF2B5EF4-FFF2-40B4-BE49-F238E27FC236}">
                 <a16:creationId xmlns:a16="http://schemas.microsoft.com/office/drawing/2014/main" id="{614B8E35-8980-EF83-8097-942C62E8B60B}"/>
               </a:ext>
             </a:extLst>
@@ -3947,7 +4050,7 @@
 </p:sld>
 </file>
 
-<file path=ppt/slides/slide6.xml><?xml version="1.0" encoding="utf-8"?>
+<file path=ppt/slides/slide7.xml><?xml version="1.0" encoding="utf-8"?>
 <p:sld xmlns:a="http://schemas.openxmlformats.org/drawingml/2006/main" xmlns:r="http://schemas.openxmlformats.org/officeDocument/2006/relationships" xmlns:p="http://schemas.openxmlformats.org/presentationml/2006/main">
   <p:cSld>
     <p:spTree>

--- a/Testsúlycsökkentő gyógyszeres terápiák.pptx
+++ b/Testsúlycsökkentő gyógyszeres terápiák.pptx
@@ -6,12 +6,15 @@
   </p:sldMasterIdLst>
   <p:sldIdLst>
     <p:sldId id="256" r:id="rId2"/>
-    <p:sldId id="257" r:id="rId3"/>
-    <p:sldId id="262" r:id="rId4"/>
-    <p:sldId id="259" r:id="rId5"/>
-    <p:sldId id="260" r:id="rId6"/>
-    <p:sldId id="258" r:id="rId7"/>
-    <p:sldId id="261" r:id="rId8"/>
+    <p:sldId id="264" r:id="rId3"/>
+    <p:sldId id="265" r:id="rId4"/>
+    <p:sldId id="257" r:id="rId5"/>
+    <p:sldId id="262" r:id="rId6"/>
+    <p:sldId id="259" r:id="rId7"/>
+    <p:sldId id="260" r:id="rId8"/>
+    <p:sldId id="258" r:id="rId9"/>
+    <p:sldId id="261" r:id="rId10"/>
+    <p:sldId id="263" r:id="rId11"/>
   </p:sldIdLst>
   <p:sldSz cx="12192000" cy="6858000"/>
   <p:notesSz cx="6858000" cy="9144000"/>
@@ -266,7 +269,7 @@
           <a:lstStyle/>
           <a:p>
             <a:fld id="{8C9917DF-FD8E-5A4B-A429-071A0169D668}" type="datetimeFigureOut">
-              <a:t>2026. 04. 23.</a:t>
+              <a:t>2026. 05. 07.</a:t>
             </a:fld>
             <a:endParaRPr lang="en-HU"/>
           </a:p>
@@ -464,7 +467,7 @@
           <a:lstStyle/>
           <a:p>
             <a:fld id="{8C9917DF-FD8E-5A4B-A429-071A0169D668}" type="datetimeFigureOut">
-              <a:t>2026. 04. 23.</a:t>
+              <a:t>2026. 05. 07.</a:t>
             </a:fld>
             <a:endParaRPr lang="en-HU"/>
           </a:p>
@@ -672,7 +675,7 @@
           <a:lstStyle/>
           <a:p>
             <a:fld id="{8C9917DF-FD8E-5A4B-A429-071A0169D668}" type="datetimeFigureOut">
-              <a:t>2026. 04. 23.</a:t>
+              <a:t>2026. 05. 07.</a:t>
             </a:fld>
             <a:endParaRPr lang="en-HU"/>
           </a:p>
@@ -870,7 +873,7 @@
           <a:lstStyle/>
           <a:p>
             <a:fld id="{8C9917DF-FD8E-5A4B-A429-071A0169D668}" type="datetimeFigureOut">
-              <a:t>2026. 04. 23.</a:t>
+              <a:t>2026. 05. 07.</a:t>
             </a:fld>
             <a:endParaRPr lang="en-HU"/>
           </a:p>
@@ -1144,7 +1147,7 @@
           <a:lstStyle/>
           <a:p>
             <a:fld id="{8C9917DF-FD8E-5A4B-A429-071A0169D668}" type="datetimeFigureOut">
-              <a:t>2026. 04. 23.</a:t>
+              <a:t>2026. 05. 07.</a:t>
             </a:fld>
             <a:endParaRPr lang="en-HU"/>
           </a:p>
@@ -1410,7 +1413,7 @@
           <a:lstStyle/>
           <a:p>
             <a:fld id="{8C9917DF-FD8E-5A4B-A429-071A0169D668}" type="datetimeFigureOut">
-              <a:t>2026. 04. 23.</a:t>
+              <a:t>2026. 05. 07.</a:t>
             </a:fld>
             <a:endParaRPr lang="en-HU"/>
           </a:p>
@@ -1823,7 +1826,7 @@
           <a:lstStyle/>
           <a:p>
             <a:fld id="{8C9917DF-FD8E-5A4B-A429-071A0169D668}" type="datetimeFigureOut">
-              <a:t>2026. 04. 23.</a:t>
+              <a:t>2026. 05. 07.</a:t>
             </a:fld>
             <a:endParaRPr lang="en-HU"/>
           </a:p>
@@ -1963,7 +1966,7 @@
           <a:lstStyle/>
           <a:p>
             <a:fld id="{8C9917DF-FD8E-5A4B-A429-071A0169D668}" type="datetimeFigureOut">
-              <a:t>2026. 04. 23.</a:t>
+              <a:t>2026. 05. 07.</a:t>
             </a:fld>
             <a:endParaRPr lang="en-HU"/>
           </a:p>
@@ -2074,7 +2077,7 @@
           <a:lstStyle/>
           <a:p>
             <a:fld id="{8C9917DF-FD8E-5A4B-A429-071A0169D668}" type="datetimeFigureOut">
-              <a:t>2026. 04. 23.</a:t>
+              <a:t>2026. 05. 07.</a:t>
             </a:fld>
             <a:endParaRPr lang="en-HU"/>
           </a:p>
@@ -2385,7 +2388,7 @@
           <a:lstStyle/>
           <a:p>
             <a:fld id="{8C9917DF-FD8E-5A4B-A429-071A0169D668}" type="datetimeFigureOut">
-              <a:t>2026. 04. 23.</a:t>
+              <a:t>2026. 05. 07.</a:t>
             </a:fld>
             <a:endParaRPr lang="en-HU"/>
           </a:p>
@@ -2672,7 +2675,7 @@
           <a:lstStyle/>
           <a:p>
             <a:fld id="{8C9917DF-FD8E-5A4B-A429-071A0169D668}" type="datetimeFigureOut">
-              <a:t>2026. 04. 23.</a:t>
+              <a:t>2026. 05. 07.</a:t>
             </a:fld>
             <a:endParaRPr lang="en-HU"/>
           </a:p>
@@ -2913,7 +2916,7 @@
           </a:lstStyle>
           <a:p>
             <a:fld id="{8C9917DF-FD8E-5A4B-A429-071A0169D668}" type="datetimeFigureOut">
-              <a:t>2026. 04. 23.</a:t>
+              <a:t>2026. 05. 07.</a:t>
             </a:fld>
             <a:endParaRPr lang="en-HU"/>
           </a:p>
@@ -3347,12 +3350,14 @@
         </p:nvSpPr>
         <p:spPr/>
         <p:txBody>
-          <a:bodyPr/>
+          <a:bodyPr>
+            <a:normAutofit fontScale="90000"/>
+          </a:bodyPr>
           <a:lstStyle/>
           <a:p>
             <a:r>
               <a:rPr lang="en-HU"/>
-              <a:t>Testsúlycsökkentő gyógyszeres terápiák</a:t>
+              <a:t>Testsúlycsökkentő gyógyszeres és életmód terápiák</a:t>
             </a:r>
           </a:p>
         </p:txBody>
@@ -3386,6 +3391,133 @@
     <p:extLst>
       <p:ext uri="{BB962C8B-B14F-4D97-AF65-F5344CB8AC3E}">
         <p14:creationId xmlns:p14="http://schemas.microsoft.com/office/powerpoint/2010/main" val="726818394"/>
+      </p:ext>
+    </p:extLst>
+  </p:cSld>
+  <p:clrMapOvr>
+    <a:masterClrMapping/>
+  </p:clrMapOvr>
+</p:sld>
+</file>
+
+<file path=ppt/slides/slide10.xml><?xml version="1.0" encoding="utf-8"?>
+<p:sld xmlns:a="http://schemas.openxmlformats.org/drawingml/2006/main" xmlns:r="http://schemas.openxmlformats.org/officeDocument/2006/relationships" xmlns:p="http://schemas.openxmlformats.org/presentationml/2006/main">
+  <p:cSld>
+    <p:spTree>
+      <p:nvGrpSpPr>
+        <p:cNvPr id="1" name=""/>
+        <p:cNvGrpSpPr/>
+        <p:nvPr/>
+      </p:nvGrpSpPr>
+      <p:grpSpPr>
+        <a:xfrm>
+          <a:off x="0" y="0"/>
+          <a:ext cx="0" cy="0"/>
+          <a:chOff x="0" y="0"/>
+          <a:chExt cx="0" cy="0"/>
+        </a:xfrm>
+      </p:grpSpPr>
+      <p:sp>
+        <p:nvSpPr>
+          <p:cNvPr id="2" name="Title 1">
+            <a:extLst>
+              <a:ext uri="{FF2B5EF4-FFF2-40B4-BE49-F238E27FC236}">
+                <a16:creationId xmlns:a16="http://schemas.microsoft.com/office/drawing/2014/main" id="{99FC7CAB-97D0-DB6F-ED83-1BE7EEBC3972}"/>
+              </a:ext>
+            </a:extLst>
+          </p:cNvPr>
+          <p:cNvSpPr>
+            <a:spLocks noGrp="1"/>
+          </p:cNvSpPr>
+          <p:nvPr>
+            <p:ph type="title"/>
+          </p:nvPr>
+        </p:nvSpPr>
+        <p:spPr/>
+        <p:txBody>
+          <a:bodyPr/>
+          <a:lstStyle/>
+          <a:p>
+            <a:r>
+              <a:rPr lang="en-HU"/>
+              <a:t>Minimum életmód</a:t>
+            </a:r>
+          </a:p>
+        </p:txBody>
+      </p:sp>
+      <p:sp>
+        <p:nvSpPr>
+          <p:cNvPr id="3" name="Content Placeholder 2">
+            <a:extLst>
+              <a:ext uri="{FF2B5EF4-FFF2-40B4-BE49-F238E27FC236}">
+                <a16:creationId xmlns:a16="http://schemas.microsoft.com/office/drawing/2014/main" id="{3336A270-DA88-7F84-5C52-E84DD07F6037}"/>
+              </a:ext>
+            </a:extLst>
+          </p:cNvPr>
+          <p:cNvSpPr>
+            <a:spLocks noGrp="1"/>
+          </p:cNvSpPr>
+          <p:nvPr>
+            <p:ph idx="1"/>
+          </p:nvPr>
+        </p:nvSpPr>
+        <p:spPr/>
+        <p:txBody>
+          <a:bodyPr/>
+          <a:lstStyle/>
+          <a:p>
+            <a:r>
+              <a:rPr lang="en-HU"/>
+              <a:t>napi egybefüggő, közepes tempójú, legalább 30-45 perc séta – heti 150-300 perc</a:t>
+            </a:r>
+          </a:p>
+          <a:p>
+            <a:pPr lvl="1"/>
+            <a:r>
+              <a:rPr lang="en-HU"/>
+              <a:t>de nem kutyasétáltatás, kirakat nézés vagy fagylaltozás</a:t>
+            </a:r>
+          </a:p>
+          <a:p>
+            <a:r>
+              <a:rPr lang="en-HU"/>
+              <a:t>heti 2x30 perc rezisztencia jellegű edzés – akár kis súlyokkal pl. 1L-es ásványvizes palack, gumiszalag</a:t>
+            </a:r>
+          </a:p>
+          <a:p>
+            <a:endParaRPr lang="en-HU"/>
+          </a:p>
+          <a:p>
+            <a:r>
+              <a:rPr lang="en-HU"/>
+              <a:t>étkezés</a:t>
+            </a:r>
+          </a:p>
+          <a:p>
+            <a:pPr lvl="1"/>
+            <a:r>
+              <a:rPr lang="en-HU"/>
+              <a:t>mennyi kalória? milyen tápanyag összetétel? milyen napi eloszlásban?</a:t>
+            </a:r>
+          </a:p>
+          <a:p>
+            <a:pPr lvl="1"/>
+            <a:r>
+              <a:rPr lang="en-HU" u="sng"/>
+              <a:t>ÉTKEZÉS NAPLÓZÁSA</a:t>
+            </a:r>
+            <a:r>
+              <a:rPr lang="en-HU"/>
+              <a:t> – Lavinia, Yazio, Kalóriabázis, kockás füzet</a:t>
+            </a:r>
+            <a:endParaRPr lang="en-HU" u="sng"/>
+          </a:p>
+        </p:txBody>
+      </p:sp>
+    </p:spTree>
+    <p:extLst>
+      <p:ext uri="{BB962C8B-B14F-4D97-AF65-F5344CB8AC3E}">
+        <p14:creationId xmlns:p14="http://schemas.microsoft.com/office/powerpoint/2010/main" val="685825264"/>
       </p:ext>
     </p:extLst>
   </p:cSld>
@@ -3417,7 +3549,7 @@
           <p:cNvPr id="2" name="Title 1">
             <a:extLst>
               <a:ext uri="{FF2B5EF4-FFF2-40B4-BE49-F238E27FC236}">
-                <a16:creationId xmlns:a16="http://schemas.microsoft.com/office/drawing/2014/main" id="{1B59BFDA-A2BC-8BC8-9CCE-5A73EBBCB5AC}"/>
+                <a16:creationId xmlns:a16="http://schemas.microsoft.com/office/drawing/2014/main" id="{AEABCE08-1B1D-43DB-CCA8-A39AEA7FFEBE}"/>
               </a:ext>
             </a:extLst>
           </p:cNvPr>
@@ -3433,10 +3565,6 @@
           <a:bodyPr/>
           <a:lstStyle/>
           <a:p>
-            <a:r>
-              <a:rPr lang="hu-HU" b="1"/>
-              <a:t>Mire valók ezek a gyógyszerek?</a:t>
-            </a:r>
             <a:endParaRPr lang="en-HU"/>
           </a:p>
         </p:txBody>
@@ -3446,7 +3574,7 @@
           <p:cNvPr id="3" name="Content Placeholder 2">
             <a:extLst>
               <a:ext uri="{FF2B5EF4-FFF2-40B4-BE49-F238E27FC236}">
-                <a16:creationId xmlns:a16="http://schemas.microsoft.com/office/drawing/2014/main" id="{C7604CA5-BE09-826E-E235-CFE097FCE66C}"/>
+                <a16:creationId xmlns:a16="http://schemas.microsoft.com/office/drawing/2014/main" id="{24FB9126-749A-FF00-916E-7A36E54988DD}"/>
               </a:ext>
             </a:extLst>
           </p:cNvPr>
@@ -3462,42 +3590,59 @@
           <a:bodyPr/>
           <a:lstStyle/>
           <a:p>
-            <a:r>
-              <a:rPr lang="hu-HU"/>
-              <a:t>az étvágy csökkentésével és a jóllakottság fokozásával segítik a testsúlycsökkenést</a:t>
-            </a:r>
-            <a:endParaRPr lang="en-HU"/>
-          </a:p>
-          <a:p>
-            <a:endParaRPr lang="en-HU">
-              <a:effectLst/>
-            </a:endParaRPr>
+            <a:endParaRPr lang="en-HU"/>
           </a:p>
           <a:p>
             <a:r>
               <a:rPr lang="en-HU"/>
-              <a:t>egyes hatóanyagoknak kimutatott szív-érrendszeri rizikócsökkentő hatásuk is van</a:t>
-            </a:r>
-          </a:p>
-          <a:p>
-            <a:endParaRPr lang="en-HU">
-              <a:effectLst/>
-            </a:endParaRPr>
-          </a:p>
-          <a:p>
+              <a:t>életmód					</a:t>
+            </a:r>
             <a:r>
               <a:rPr lang="en-HU">
-                <a:effectLst/>
+                <a:sym typeface="Wingdings" pitchFamily="2" charset="2"/>
               </a:rPr>
-              <a:t>további előnyös hatások: vércukor-, vérzsír anyagcsere, vesevédelem, zsírmáj, alvási apnoe szindróma</a:t>
-            </a:r>
+              <a:t>  </a:t>
+            </a:r>
+            <a:endParaRPr lang="en-HU"/>
+          </a:p>
+          <a:p>
+            <a:endParaRPr lang="en-HU"/>
+          </a:p>
+          <a:p>
+            <a:r>
+              <a:rPr lang="en-HU"/>
+              <a:t>gyógyszeres terápiák			</a:t>
+            </a:r>
+            <a:r>
+              <a:rPr lang="en-HU">
+                <a:sym typeface="Wingdings" pitchFamily="2" charset="2"/>
+              </a:rPr>
+              <a:t>   </a:t>
+            </a:r>
+            <a:endParaRPr lang="en-HU"/>
+          </a:p>
+          <a:p>
+            <a:endParaRPr lang="en-HU"/>
+          </a:p>
+          <a:p>
+            <a:r>
+              <a:rPr lang="en-HU"/>
+              <a:t>életmód + gyógyszeres terápia	</a:t>
+            </a:r>
+            <a:r>
+              <a:rPr lang="en-HU">
+                <a:sym typeface="Wingdings" pitchFamily="2" charset="2"/>
+              </a:rPr>
+              <a:t>   </a:t>
+            </a:r>
+            <a:endParaRPr lang="en-HU"/>
           </a:p>
         </p:txBody>
       </p:sp>
     </p:spTree>
     <p:extLst>
       <p:ext uri="{BB962C8B-B14F-4D97-AF65-F5344CB8AC3E}">
-        <p14:creationId xmlns:p14="http://schemas.microsoft.com/office/powerpoint/2010/main" val="2123824416"/>
+        <p14:creationId xmlns:p14="http://schemas.microsoft.com/office/powerpoint/2010/main" val="3861470865"/>
       </p:ext>
     </p:extLst>
   </p:cSld>
@@ -3512,7 +3657,13 @@
   <p:cSld>
     <p:spTree>
       <p:nvGrpSpPr>
-        <p:cNvPr id="1" name=""/>
+        <p:cNvPr id="1" name="">
+          <a:extLst>
+            <a:ext uri="{FF2B5EF4-FFF2-40B4-BE49-F238E27FC236}">
+              <a16:creationId xmlns:a16="http://schemas.microsoft.com/office/drawing/2014/main" id="{B64D131D-774B-2FE0-6388-EBACD5B0C385}"/>
+            </a:ext>
+          </a:extLst>
+        </p:cNvPr>
         <p:cNvGrpSpPr/>
         <p:nvPr/>
       </p:nvGrpSpPr>
@@ -3529,7 +3680,7 @@
           <p:cNvPr id="2" name="Title 1">
             <a:extLst>
               <a:ext uri="{FF2B5EF4-FFF2-40B4-BE49-F238E27FC236}">
-                <a16:creationId xmlns:a16="http://schemas.microsoft.com/office/drawing/2014/main" id="{9101AFE8-ABD4-BCF2-2F0B-4DDCAAA59397}"/>
+                <a16:creationId xmlns:a16="http://schemas.microsoft.com/office/drawing/2014/main" id="{73E33182-9D41-56A1-BC0E-1F9322EC6114}"/>
               </a:ext>
             </a:extLst>
           </p:cNvPr>
@@ -3545,10 +3696,7 @@
           <a:bodyPr/>
           <a:lstStyle/>
           <a:p>
-            <a:r>
-              <a:rPr lang="en-HU" b="1"/>
-              <a:t>Ellenjavallatok</a:t>
-            </a:r>
+            <a:endParaRPr lang="en-HU"/>
           </a:p>
         </p:txBody>
       </p:sp>
@@ -3557,7 +3705,7 @@
           <p:cNvPr id="3" name="Content Placeholder 2">
             <a:extLst>
               <a:ext uri="{FF2B5EF4-FFF2-40B4-BE49-F238E27FC236}">
-                <a16:creationId xmlns:a16="http://schemas.microsoft.com/office/drawing/2014/main" id="{4022614A-23D0-B275-4015-739224BB73AA}"/>
+                <a16:creationId xmlns:a16="http://schemas.microsoft.com/office/drawing/2014/main" id="{9593DE0A-94FC-965B-485D-E3D3DDD468DD}"/>
               </a:ext>
             </a:extLst>
           </p:cNvPr>
@@ -3570,97 +3718,92 @@
         </p:nvSpPr>
         <p:spPr/>
         <p:txBody>
-          <a:bodyPr>
-            <a:normAutofit lnSpcReduction="10000"/>
-          </a:bodyPr>
-          <a:lstStyle/>
-          <a:p>
-            <a:pPr>
-              <a:buFontTx/>
-              <a:buChar char="-"/>
-            </a:pPr>
+          <a:bodyPr/>
+          <a:lstStyle/>
+          <a:p>
+            <a:endParaRPr lang="en-HU"/>
+          </a:p>
+          <a:p>
             <a:r>
               <a:rPr lang="en-HU"/>
-              <a:t>terhesség, szoptatás</a:t>
-            </a:r>
-          </a:p>
-          <a:p>
-            <a:pPr>
-              <a:buFontTx/>
-              <a:buChar char="-"/>
-            </a:pPr>
+              <a:t>életmód					</a:t>
+            </a:r>
+            <a:r>
+              <a:rPr lang="en-HU">
+                <a:sym typeface="Wingdings" pitchFamily="2" charset="2"/>
+              </a:rPr>
+              <a:t>  </a:t>
+            </a:r>
+            <a:endParaRPr lang="en-HU"/>
+          </a:p>
+          <a:p>
+            <a:endParaRPr lang="en-HU"/>
+          </a:p>
+          <a:p>
             <a:r>
               <a:rPr lang="en-HU"/>
-              <a:t>bizonyos típusú pajzsmirigyrákok</a:t>
-            </a:r>
-          </a:p>
-          <a:p>
-            <a:pPr>
-              <a:buFontTx/>
-              <a:buChar char="-"/>
-            </a:pPr>
+              <a:t>gyógyszeres terápiák			</a:t>
+            </a:r>
+            <a:r>
+              <a:rPr lang="en-HU">
+                <a:sym typeface="Wingdings" pitchFamily="2" charset="2"/>
+              </a:rPr>
+              <a:t>   </a:t>
+            </a:r>
+            <a:endParaRPr lang="en-HU"/>
+          </a:p>
+          <a:p>
+            <a:endParaRPr lang="en-HU"/>
+          </a:p>
+          <a:p>
             <a:r>
               <a:rPr lang="en-HU"/>
-              <a:t>ún. MEN-2 szindróma (öröklődő pajzsmirigy + mellékvese daganat)</a:t>
-            </a:r>
-          </a:p>
-          <a:p>
-            <a:pPr>
-              <a:buFontTx/>
-              <a:buChar char="-"/>
-            </a:pPr>
-            <a:r>
-              <a:rPr lang="en-HU"/>
-              <a:t>bizonyos típusú hasnyálmirigy gyulladás az előzményben</a:t>
-            </a:r>
-          </a:p>
-          <a:p>
-            <a:pPr marL="0" indent="0">
-              <a:buNone/>
-            </a:pPr>
-            <a:endParaRPr lang="en-HU" b="1"/>
-          </a:p>
-          <a:p>
-            <a:pPr marL="0" indent="0">
-              <a:buNone/>
-            </a:pPr>
-            <a:r>
-              <a:rPr lang="en-HU" b="1"/>
-              <a:t>Ritka, de fontos kezelés alatti kockázatok</a:t>
-            </a:r>
-          </a:p>
-          <a:p>
-            <a:pPr>
-              <a:buFontTx/>
-              <a:buChar char="-"/>
-            </a:pPr>
-            <a:r>
-              <a:rPr lang="en-HU"/>
-              <a:t>hasnyálmirigy gyulladás – erős, övszerű hasi fájdalom hányással</a:t>
-            </a:r>
-          </a:p>
-          <a:p>
-            <a:pPr>
-              <a:buFontTx/>
-              <a:buChar char="-"/>
-            </a:pPr>
-            <a:r>
-              <a:rPr lang="en-HU"/>
-              <a:t>egyoldali fájdalmatlan látásvesztés</a:t>
-            </a:r>
-          </a:p>
-          <a:p>
-            <a:pPr marL="0" indent="0">
-              <a:buNone/>
-            </a:pPr>
-            <a:endParaRPr lang="en-HU"/>
-          </a:p>
-        </p:txBody>
-      </p:sp>
+              <a:t>életmód + gyógyszeres terápia	</a:t>
+            </a:r>
+            <a:r>
+              <a:rPr lang="en-HU">
+                <a:sym typeface="Wingdings" pitchFamily="2" charset="2"/>
+              </a:rPr>
+              <a:t>   </a:t>
+            </a:r>
+            <a:endParaRPr lang="en-HU"/>
+          </a:p>
+        </p:txBody>
+      </p:sp>
+      <p:pic>
+        <p:nvPicPr>
+          <p:cNvPr id="6" name="Picture 5">
+            <a:extLst>
+              <a:ext uri="{FF2B5EF4-FFF2-40B4-BE49-F238E27FC236}">
+                <a16:creationId xmlns:a16="http://schemas.microsoft.com/office/drawing/2014/main" id="{5429B606-F6DD-CC7D-F651-01D4B5E1A911}"/>
+              </a:ext>
+            </a:extLst>
+          </p:cNvPr>
+          <p:cNvPicPr>
+            <a:picLocks noChangeAspect="1"/>
+          </p:cNvPicPr>
+          <p:nvPr/>
+        </p:nvPicPr>
+        <p:blipFill>
+          <a:blip r:embed="rId2"/>
+          <a:stretch>
+            <a:fillRect/>
+          </a:stretch>
+        </p:blipFill>
+        <p:spPr>
+          <a:xfrm>
+            <a:off x="2844800" y="177800"/>
+            <a:ext cx="6502400" cy="6502400"/>
+          </a:xfrm>
+          <a:prstGeom prst="rect">
+            <a:avLst/>
+          </a:prstGeom>
+        </p:spPr>
+      </p:pic>
     </p:spTree>
     <p:extLst>
       <p:ext uri="{BB962C8B-B14F-4D97-AF65-F5344CB8AC3E}">
-        <p14:creationId xmlns:p14="http://schemas.microsoft.com/office/powerpoint/2010/main" val="1405731578"/>
+        <p14:creationId xmlns:p14="http://schemas.microsoft.com/office/powerpoint/2010/main" val="2002058799"/>
       </p:ext>
     </p:extLst>
   </p:cSld>
@@ -3692,7 +3835,7 @@
           <p:cNvPr id="2" name="Title 1">
             <a:extLst>
               <a:ext uri="{FF2B5EF4-FFF2-40B4-BE49-F238E27FC236}">
-                <a16:creationId xmlns:a16="http://schemas.microsoft.com/office/drawing/2014/main" id="{5172F720-8A5B-06E0-4FF0-415FF29DEB31}"/>
+                <a16:creationId xmlns:a16="http://schemas.microsoft.com/office/drawing/2014/main" id="{1B59BFDA-A2BC-8BC8-9CCE-5A73EBBCB5AC}"/>
               </a:ext>
             </a:extLst>
           </p:cNvPr>
@@ -3710,7 +3853,7 @@
           <a:p>
             <a:r>
               <a:rPr lang="hu-HU" b="1"/>
-              <a:t>Gyakoribb mellékhatások</a:t>
+              <a:t>Mire valók ezek a gyógyszerek?</a:t>
             </a:r>
             <a:endParaRPr lang="en-HU"/>
           </a:p>
@@ -3721,7 +3864,7 @@
           <p:cNvPr id="3" name="Content Placeholder 2">
             <a:extLst>
               <a:ext uri="{FF2B5EF4-FFF2-40B4-BE49-F238E27FC236}">
-                <a16:creationId xmlns:a16="http://schemas.microsoft.com/office/drawing/2014/main" id="{FC7E3A50-1EEF-607B-03C3-56B25C18547A}"/>
+                <a16:creationId xmlns:a16="http://schemas.microsoft.com/office/drawing/2014/main" id="{C7604CA5-BE09-826E-E235-CFE097FCE66C}"/>
               </a:ext>
             </a:extLst>
           </p:cNvPr>
@@ -3734,59 +3877,37 @@
         </p:nvSpPr>
         <p:spPr/>
         <p:txBody>
-          <a:bodyPr>
-            <a:normAutofit/>
-          </a:bodyPr>
-          <a:lstStyle/>
-          <a:p>
-            <a:pPr marL="0" indent="0">
-              <a:buNone/>
-            </a:pPr>
-            <a:endParaRPr lang="en-HU"/>
-          </a:p>
-          <a:p>
-            <a:pPr marL="0" indent="0">
-              <a:buNone/>
-            </a:pPr>
+          <a:bodyPr/>
+          <a:lstStyle/>
+          <a:p>
+            <a:r>
+              <a:rPr lang="hu-HU"/>
+              <a:t>az étvágy csökkentésével és a jóllakottság fokozásával segítik a testsúlycsökkenést</a:t>
+            </a:r>
+            <a:endParaRPr lang="en-HU"/>
+          </a:p>
+          <a:p>
+            <a:endParaRPr lang="en-HU">
+              <a:effectLst/>
+            </a:endParaRPr>
+          </a:p>
+          <a:p>
             <a:r>
               <a:rPr lang="en-HU"/>
-              <a:t>Hányinger, hányás</a:t>
-            </a:r>
-          </a:p>
-          <a:p>
-            <a:pPr marL="0" indent="0">
-              <a:buNone/>
-            </a:pPr>
-            <a:r>
-              <a:rPr lang="en-HU"/>
-              <a:t>Hasmenés vagy székrekedés</a:t>
-            </a:r>
-          </a:p>
-          <a:p>
-            <a:pPr marL="0" indent="0">
-              <a:buNone/>
-            </a:pPr>
-            <a:r>
-              <a:rPr lang="en-HU"/>
-              <a:t>Puffadás vagy teltségérzés</a:t>
-            </a:r>
-          </a:p>
-          <a:p>
-            <a:pPr marL="0" indent="0">
-              <a:buNone/>
-            </a:pPr>
-            <a:r>
-              <a:rPr lang="en-HU"/>
-              <a:t>Fáradtság</a:t>
-            </a:r>
-          </a:p>
-          <a:p>
-            <a:pPr marL="0" indent="0">
-              <a:buNone/>
-            </a:pPr>
-            <a:r>
-              <a:rPr lang="en-HU"/>
-              <a:t>Hajhullás</a:t>
+              <a:t>egyes hatóanyagoknak kimutatott szív-érrendszeri rizikócsökkentő hatásuk is van</a:t>
+            </a:r>
+          </a:p>
+          <a:p>
+            <a:endParaRPr lang="en-HU">
+              <a:effectLst/>
+            </a:endParaRPr>
+          </a:p>
+          <a:p>
+            <a:r>
+              <a:rPr lang="en-HU">
+                <a:effectLst/>
+              </a:rPr>
+              <a:t>további előnyös hatások: vércukor-, vérzsír anyagcsere, vesevédelem, zsírmáj, alvási apnoe szindróma</a:t>
             </a:r>
           </a:p>
         </p:txBody>
@@ -3794,7 +3915,7 @@
     </p:spTree>
     <p:extLst>
       <p:ext uri="{BB962C8B-B14F-4D97-AF65-F5344CB8AC3E}">
-        <p14:creationId xmlns:p14="http://schemas.microsoft.com/office/powerpoint/2010/main" val="1797897794"/>
+        <p14:creationId xmlns:p14="http://schemas.microsoft.com/office/powerpoint/2010/main" val="2123824416"/>
       </p:ext>
     </p:extLst>
   </p:cSld>
@@ -3826,7 +3947,7 @@
           <p:cNvPr id="2" name="Title 1">
             <a:extLst>
               <a:ext uri="{FF2B5EF4-FFF2-40B4-BE49-F238E27FC236}">
-                <a16:creationId xmlns:a16="http://schemas.microsoft.com/office/drawing/2014/main" id="{CAE58BA9-93C5-3F91-FA1C-6F665CC15BCF}"/>
+                <a16:creationId xmlns:a16="http://schemas.microsoft.com/office/drawing/2014/main" id="{9101AFE8-ABD4-BCF2-2F0B-4DDCAAA59397}"/>
               </a:ext>
             </a:extLst>
           </p:cNvPr>
@@ -3844,7 +3965,7 @@
           <a:p>
             <a:r>
               <a:rPr lang="en-HU" b="1"/>
-              <a:t>Mire kell figyelni?</a:t>
+              <a:t>Ellenjavallatok</a:t>
             </a:r>
           </a:p>
         </p:txBody>
@@ -3854,7 +3975,7 @@
           <p:cNvPr id="3" name="Content Placeholder 2">
             <a:extLst>
               <a:ext uri="{FF2B5EF4-FFF2-40B4-BE49-F238E27FC236}">
-                <a16:creationId xmlns:a16="http://schemas.microsoft.com/office/drawing/2014/main" id="{49DC2C35-5DC2-1029-B05F-4150FF524E45}"/>
+                <a16:creationId xmlns:a16="http://schemas.microsoft.com/office/drawing/2014/main" id="{4022614A-23D0-B275-4015-739224BB73AA}"/>
               </a:ext>
             </a:extLst>
           </p:cNvPr>
@@ -3868,42 +3989,96 @@
         <p:spPr/>
         <p:txBody>
           <a:bodyPr>
-            <a:normAutofit/>
+            <a:normAutofit lnSpcReduction="10000"/>
           </a:bodyPr>
           <a:lstStyle/>
           <a:p>
-            <a:endParaRPr lang="en-HU"/>
-          </a:p>
-          <a:p>
-            <a:endParaRPr lang="en-HU"/>
-          </a:p>
-          <a:p>
+            <a:pPr>
+              <a:buFontTx/>
+              <a:buChar char="-"/>
+            </a:pPr>
             <a:r>
               <a:rPr lang="en-HU"/>
-              <a:t>nagy volumenű étkezés, alkoholfogyasztás ne legyen</a:t>
-            </a:r>
-          </a:p>
-          <a:p>
+              <a:t>terhesség, szoptatás</a:t>
+            </a:r>
+          </a:p>
+          <a:p>
+            <a:pPr>
+              <a:buFontTx/>
+              <a:buChar char="-"/>
+            </a:pPr>
             <a:r>
               <a:rPr lang="en-HU"/>
-              <a:t>megfelelő folyadékfogyasztásra figyeljen</a:t>
-            </a:r>
-          </a:p>
-          <a:p>
-            <a:endParaRPr lang="en-HU"/>
-          </a:p>
-          <a:p>
+              <a:t>bizonyos típusú pajzsmirigyrákok</a:t>
+            </a:r>
+          </a:p>
+          <a:p>
+            <a:pPr>
+              <a:buFontTx/>
+              <a:buChar char="-"/>
+            </a:pPr>
             <a:r>
               <a:rPr lang="en-HU"/>
-              <a:t>életmód, tréning, fehérjebevitel ugyanúgy fontos az izomvesztés elkerülésére</a:t>
-            </a:r>
+              <a:t>ún. MEN-2 szindróma (öröklődő pajzsmirigy + mellékvese daganat)</a:t>
+            </a:r>
+          </a:p>
+          <a:p>
+            <a:pPr>
+              <a:buFontTx/>
+              <a:buChar char="-"/>
+            </a:pPr>
+            <a:r>
+              <a:rPr lang="en-HU"/>
+              <a:t>bizonyos típusú hasnyálmirigy gyulladás az előzményben</a:t>
+            </a:r>
+          </a:p>
+          <a:p>
+            <a:pPr marL="0" indent="0">
+              <a:buNone/>
+            </a:pPr>
+            <a:endParaRPr lang="en-HU" b="1"/>
+          </a:p>
+          <a:p>
+            <a:pPr marL="0" indent="0">
+              <a:buNone/>
+            </a:pPr>
+            <a:r>
+              <a:rPr lang="en-HU" b="1"/>
+              <a:t>Ritka, de fontos kezelés alatti kockázatok</a:t>
+            </a:r>
+          </a:p>
+          <a:p>
+            <a:pPr>
+              <a:buFontTx/>
+              <a:buChar char="-"/>
+            </a:pPr>
+            <a:r>
+              <a:rPr lang="en-HU"/>
+              <a:t>hasnyálmirigy gyulladás – erős, övszerű hasi fájdalom hányással</a:t>
+            </a:r>
+          </a:p>
+          <a:p>
+            <a:pPr>
+              <a:buFontTx/>
+              <a:buChar char="-"/>
+            </a:pPr>
+            <a:r>
+              <a:rPr lang="en-HU"/>
+              <a:t>egyoldali fájdalmatlan látásvesztés</a:t>
+            </a:r>
+          </a:p>
+          <a:p>
+            <a:pPr marL="0" indent="0">
+              <a:buNone/>
+            </a:pPr>
+            <a:endParaRPr lang="en-HU"/>
           </a:p>
         </p:txBody>
       </p:sp>
     </p:spTree>
     <p:extLst>
       <p:ext uri="{BB962C8B-B14F-4D97-AF65-F5344CB8AC3E}">
-        <p14:creationId xmlns:p14="http://schemas.microsoft.com/office/powerpoint/2010/main" val="3775309155"/>
+        <p14:creationId xmlns:p14="http://schemas.microsoft.com/office/powerpoint/2010/main" val="1405731578"/>
       </p:ext>
     </p:extLst>
   </p:cSld>
@@ -3935,6 +4110,249 @@
           <p:cNvPr id="2" name="Title 1">
             <a:extLst>
               <a:ext uri="{FF2B5EF4-FFF2-40B4-BE49-F238E27FC236}">
+                <a16:creationId xmlns:a16="http://schemas.microsoft.com/office/drawing/2014/main" id="{5172F720-8A5B-06E0-4FF0-415FF29DEB31}"/>
+              </a:ext>
+            </a:extLst>
+          </p:cNvPr>
+          <p:cNvSpPr>
+            <a:spLocks noGrp="1"/>
+          </p:cNvSpPr>
+          <p:nvPr>
+            <p:ph type="title"/>
+          </p:nvPr>
+        </p:nvSpPr>
+        <p:spPr/>
+        <p:txBody>
+          <a:bodyPr/>
+          <a:lstStyle/>
+          <a:p>
+            <a:r>
+              <a:rPr lang="hu-HU" b="1"/>
+              <a:t>Gyakoribb mellékhatások</a:t>
+            </a:r>
+            <a:endParaRPr lang="en-HU"/>
+          </a:p>
+        </p:txBody>
+      </p:sp>
+      <p:sp>
+        <p:nvSpPr>
+          <p:cNvPr id="3" name="Content Placeholder 2">
+            <a:extLst>
+              <a:ext uri="{FF2B5EF4-FFF2-40B4-BE49-F238E27FC236}">
+                <a16:creationId xmlns:a16="http://schemas.microsoft.com/office/drawing/2014/main" id="{FC7E3A50-1EEF-607B-03C3-56B25C18547A}"/>
+              </a:ext>
+            </a:extLst>
+          </p:cNvPr>
+          <p:cNvSpPr>
+            <a:spLocks noGrp="1"/>
+          </p:cNvSpPr>
+          <p:nvPr>
+            <p:ph idx="1"/>
+          </p:nvPr>
+        </p:nvSpPr>
+        <p:spPr/>
+        <p:txBody>
+          <a:bodyPr>
+            <a:normAutofit/>
+          </a:bodyPr>
+          <a:lstStyle/>
+          <a:p>
+            <a:pPr marL="0" indent="0">
+              <a:buNone/>
+            </a:pPr>
+            <a:endParaRPr lang="en-HU"/>
+          </a:p>
+          <a:p>
+            <a:pPr marL="0" indent="0">
+              <a:buNone/>
+            </a:pPr>
+            <a:r>
+              <a:rPr lang="en-HU"/>
+              <a:t>Hányinger, hányás</a:t>
+            </a:r>
+          </a:p>
+          <a:p>
+            <a:pPr marL="0" indent="0">
+              <a:buNone/>
+            </a:pPr>
+            <a:r>
+              <a:rPr lang="en-HU"/>
+              <a:t>Hasmenés vagy székrekedés</a:t>
+            </a:r>
+          </a:p>
+          <a:p>
+            <a:pPr marL="0" indent="0">
+              <a:buNone/>
+            </a:pPr>
+            <a:r>
+              <a:rPr lang="en-HU"/>
+              <a:t>Puffadás vagy teltségérzés</a:t>
+            </a:r>
+          </a:p>
+          <a:p>
+            <a:pPr marL="0" indent="0">
+              <a:buNone/>
+            </a:pPr>
+            <a:r>
+              <a:rPr lang="en-HU"/>
+              <a:t>Fáradtság</a:t>
+            </a:r>
+          </a:p>
+          <a:p>
+            <a:pPr marL="0" indent="0">
+              <a:buNone/>
+            </a:pPr>
+            <a:r>
+              <a:rPr lang="en-HU"/>
+              <a:t>Hajhullás</a:t>
+            </a:r>
+          </a:p>
+        </p:txBody>
+      </p:sp>
+    </p:spTree>
+    <p:extLst>
+      <p:ext uri="{BB962C8B-B14F-4D97-AF65-F5344CB8AC3E}">
+        <p14:creationId xmlns:p14="http://schemas.microsoft.com/office/powerpoint/2010/main" val="1797897794"/>
+      </p:ext>
+    </p:extLst>
+  </p:cSld>
+  <p:clrMapOvr>
+    <a:masterClrMapping/>
+  </p:clrMapOvr>
+</p:sld>
+</file>
+
+<file path=ppt/slides/slide7.xml><?xml version="1.0" encoding="utf-8"?>
+<p:sld xmlns:a="http://schemas.openxmlformats.org/drawingml/2006/main" xmlns:r="http://schemas.openxmlformats.org/officeDocument/2006/relationships" xmlns:p="http://schemas.openxmlformats.org/presentationml/2006/main">
+  <p:cSld>
+    <p:spTree>
+      <p:nvGrpSpPr>
+        <p:cNvPr id="1" name=""/>
+        <p:cNvGrpSpPr/>
+        <p:nvPr/>
+      </p:nvGrpSpPr>
+      <p:grpSpPr>
+        <a:xfrm>
+          <a:off x="0" y="0"/>
+          <a:ext cx="0" cy="0"/>
+          <a:chOff x="0" y="0"/>
+          <a:chExt cx="0" cy="0"/>
+        </a:xfrm>
+      </p:grpSpPr>
+      <p:sp>
+        <p:nvSpPr>
+          <p:cNvPr id="2" name="Title 1">
+            <a:extLst>
+              <a:ext uri="{FF2B5EF4-FFF2-40B4-BE49-F238E27FC236}">
+                <a16:creationId xmlns:a16="http://schemas.microsoft.com/office/drawing/2014/main" id="{CAE58BA9-93C5-3F91-FA1C-6F665CC15BCF}"/>
+              </a:ext>
+            </a:extLst>
+          </p:cNvPr>
+          <p:cNvSpPr>
+            <a:spLocks noGrp="1"/>
+          </p:cNvSpPr>
+          <p:nvPr>
+            <p:ph type="title"/>
+          </p:nvPr>
+        </p:nvSpPr>
+        <p:spPr/>
+        <p:txBody>
+          <a:bodyPr/>
+          <a:lstStyle/>
+          <a:p>
+            <a:r>
+              <a:rPr lang="en-HU" b="1"/>
+              <a:t>Mire kell figyelni?</a:t>
+            </a:r>
+          </a:p>
+        </p:txBody>
+      </p:sp>
+      <p:sp>
+        <p:nvSpPr>
+          <p:cNvPr id="3" name="Content Placeholder 2">
+            <a:extLst>
+              <a:ext uri="{FF2B5EF4-FFF2-40B4-BE49-F238E27FC236}">
+                <a16:creationId xmlns:a16="http://schemas.microsoft.com/office/drawing/2014/main" id="{49DC2C35-5DC2-1029-B05F-4150FF524E45}"/>
+              </a:ext>
+            </a:extLst>
+          </p:cNvPr>
+          <p:cNvSpPr>
+            <a:spLocks noGrp="1"/>
+          </p:cNvSpPr>
+          <p:nvPr>
+            <p:ph idx="1"/>
+          </p:nvPr>
+        </p:nvSpPr>
+        <p:spPr/>
+        <p:txBody>
+          <a:bodyPr>
+            <a:normAutofit/>
+          </a:bodyPr>
+          <a:lstStyle/>
+          <a:p>
+            <a:endParaRPr lang="en-HU"/>
+          </a:p>
+          <a:p>
+            <a:endParaRPr lang="en-HU"/>
+          </a:p>
+          <a:p>
+            <a:r>
+              <a:rPr lang="en-HU"/>
+              <a:t>nagy volumenű étkezés, alkoholfogyasztás ne legyen</a:t>
+            </a:r>
+          </a:p>
+          <a:p>
+            <a:r>
+              <a:rPr lang="en-HU"/>
+              <a:t>megfelelő folyadékfogyasztásra figyeljen</a:t>
+            </a:r>
+          </a:p>
+          <a:p>
+            <a:endParaRPr lang="en-HU"/>
+          </a:p>
+          <a:p>
+            <a:r>
+              <a:rPr lang="en-HU"/>
+              <a:t>életmód, tréning, fehérjebevitel ugyanúgy fontos az izomvesztés elkerülésére</a:t>
+            </a:r>
+          </a:p>
+        </p:txBody>
+      </p:sp>
+    </p:spTree>
+    <p:extLst>
+      <p:ext uri="{BB962C8B-B14F-4D97-AF65-F5344CB8AC3E}">
+        <p14:creationId xmlns:p14="http://schemas.microsoft.com/office/powerpoint/2010/main" val="3775309155"/>
+      </p:ext>
+    </p:extLst>
+  </p:cSld>
+  <p:clrMapOvr>
+    <a:masterClrMapping/>
+  </p:clrMapOvr>
+</p:sld>
+</file>
+
+<file path=ppt/slides/slide8.xml><?xml version="1.0" encoding="utf-8"?>
+<p:sld xmlns:a="http://schemas.openxmlformats.org/drawingml/2006/main" xmlns:r="http://schemas.openxmlformats.org/officeDocument/2006/relationships" xmlns:p="http://schemas.openxmlformats.org/presentationml/2006/main">
+  <p:cSld>
+    <p:spTree>
+      <p:nvGrpSpPr>
+        <p:cNvPr id="1" name=""/>
+        <p:cNvGrpSpPr/>
+        <p:nvPr/>
+      </p:nvGrpSpPr>
+      <p:grpSpPr>
+        <a:xfrm>
+          <a:off x="0" y="0"/>
+          <a:ext cx="0" cy="0"/>
+          <a:chOff x="0" y="0"/>
+          <a:chExt cx="0" cy="0"/>
+        </a:xfrm>
+      </p:grpSpPr>
+      <p:sp>
+        <p:nvSpPr>
+          <p:cNvPr id="2" name="Title 1">
+            <a:extLst>
+              <a:ext uri="{FF2B5EF4-FFF2-40B4-BE49-F238E27FC236}">
                 <a16:creationId xmlns:a16="http://schemas.microsoft.com/office/drawing/2014/main" id="{614B8E35-8980-EF83-8097-942C62E8B60B}"/>
               </a:ext>
             </a:extLst>
@@ -4050,7 +4468,7 @@
 </p:sld>
 </file>
 
-<file path=ppt/slides/slide7.xml><?xml version="1.0" encoding="utf-8"?>
+<file path=ppt/slides/slide9.xml><?xml version="1.0" encoding="utf-8"?>
 <p:sld xmlns:a="http://schemas.openxmlformats.org/drawingml/2006/main" xmlns:r="http://schemas.openxmlformats.org/officeDocument/2006/relationships" xmlns:p="http://schemas.openxmlformats.org/presentationml/2006/main">
   <p:cSld>
     <p:spTree>

--- a/Testsúlycsökkentő gyógyszeres terápiák.pptx
+++ b/Testsúlycsökkentő gyógyszeres terápiák.pptx
@@ -1,6 +1,6 @@
 
 <file path=ppt/presentation.xml><?xml version="1.0" encoding="utf-8"?>
-<p:presentation xmlns:a="http://schemas.openxmlformats.org/drawingml/2006/main" xmlns:r="http://schemas.openxmlformats.org/officeDocument/2006/relationships" xmlns:p="http://schemas.openxmlformats.org/presentationml/2006/main" saveSubsetFonts="1" autoCompressPictures="0">
+<p:presentation xmlns:a="http://schemas.openxmlformats.org/drawingml/2006/main" xmlns:r="http://schemas.openxmlformats.org/officeDocument/2006/relationships" xmlns:p="http://schemas.openxmlformats.org/presentationml/2006/main" embedTrueTypeFonts="1" saveSubsetFonts="1" autoCompressPictures="0">
   <p:sldMasterIdLst>
     <p:sldMasterId id="2147483648" r:id="rId1"/>
   </p:sldMasterIdLst>
@@ -269,7 +269,7 @@
           <a:lstStyle/>
           <a:p>
             <a:fld id="{8C9917DF-FD8E-5A4B-A429-071A0169D668}" type="datetimeFigureOut">
-              <a:t>2026. 05. 07.</a:t>
+              <a:t>2026. 05. 20.</a:t>
             </a:fld>
             <a:endParaRPr lang="en-HU"/>
           </a:p>
@@ -467,7 +467,7 @@
           <a:lstStyle/>
           <a:p>
             <a:fld id="{8C9917DF-FD8E-5A4B-A429-071A0169D668}" type="datetimeFigureOut">
-              <a:t>2026. 05. 07.</a:t>
+              <a:t>2026. 05. 20.</a:t>
             </a:fld>
             <a:endParaRPr lang="en-HU"/>
           </a:p>
@@ -675,7 +675,7 @@
           <a:lstStyle/>
           <a:p>
             <a:fld id="{8C9917DF-FD8E-5A4B-A429-071A0169D668}" type="datetimeFigureOut">
-              <a:t>2026. 05. 07.</a:t>
+              <a:t>2026. 05. 20.</a:t>
             </a:fld>
             <a:endParaRPr lang="en-HU"/>
           </a:p>
@@ -873,7 +873,7 @@
           <a:lstStyle/>
           <a:p>
             <a:fld id="{8C9917DF-FD8E-5A4B-A429-071A0169D668}" type="datetimeFigureOut">
-              <a:t>2026. 05. 07.</a:t>
+              <a:t>2026. 05. 20.</a:t>
             </a:fld>
             <a:endParaRPr lang="en-HU"/>
           </a:p>
@@ -1147,7 +1147,7 @@
           <a:lstStyle/>
           <a:p>
             <a:fld id="{8C9917DF-FD8E-5A4B-A429-071A0169D668}" type="datetimeFigureOut">
-              <a:t>2026. 05. 07.</a:t>
+              <a:t>2026. 05. 20.</a:t>
             </a:fld>
             <a:endParaRPr lang="en-HU"/>
           </a:p>
@@ -1413,7 +1413,7 @@
           <a:lstStyle/>
           <a:p>
             <a:fld id="{8C9917DF-FD8E-5A4B-A429-071A0169D668}" type="datetimeFigureOut">
-              <a:t>2026. 05. 07.</a:t>
+              <a:t>2026. 05. 20.</a:t>
             </a:fld>
             <a:endParaRPr lang="en-HU"/>
           </a:p>
@@ -1826,7 +1826,7 @@
           <a:lstStyle/>
           <a:p>
             <a:fld id="{8C9917DF-FD8E-5A4B-A429-071A0169D668}" type="datetimeFigureOut">
-              <a:t>2026. 05. 07.</a:t>
+              <a:t>2026. 05. 20.</a:t>
             </a:fld>
             <a:endParaRPr lang="en-HU"/>
           </a:p>
@@ -1966,7 +1966,7 @@
           <a:lstStyle/>
           <a:p>
             <a:fld id="{8C9917DF-FD8E-5A4B-A429-071A0169D668}" type="datetimeFigureOut">
-              <a:t>2026. 05. 07.</a:t>
+              <a:t>2026. 05. 20.</a:t>
             </a:fld>
             <a:endParaRPr lang="en-HU"/>
           </a:p>
@@ -2077,7 +2077,7 @@
           <a:lstStyle/>
           <a:p>
             <a:fld id="{8C9917DF-FD8E-5A4B-A429-071A0169D668}" type="datetimeFigureOut">
-              <a:t>2026. 05. 07.</a:t>
+              <a:t>2026. 05. 20.</a:t>
             </a:fld>
             <a:endParaRPr lang="en-HU"/>
           </a:p>
@@ -2388,7 +2388,7 @@
           <a:lstStyle/>
           <a:p>
             <a:fld id="{8C9917DF-FD8E-5A4B-A429-071A0169D668}" type="datetimeFigureOut">
-              <a:t>2026. 05. 07.</a:t>
+              <a:t>2026. 05. 20.</a:t>
             </a:fld>
             <a:endParaRPr lang="en-HU"/>
           </a:p>
@@ -2675,7 +2675,7 @@
           <a:lstStyle/>
           <a:p>
             <a:fld id="{8C9917DF-FD8E-5A4B-A429-071A0169D668}" type="datetimeFigureOut">
-              <a:t>2026. 05. 07.</a:t>
+              <a:t>2026. 05. 20.</a:t>
             </a:fld>
             <a:endParaRPr lang="en-HU"/>
           </a:p>
@@ -2916,7 +2916,7 @@
           </a:lstStyle>
           <a:p>
             <a:fld id="{8C9917DF-FD8E-5A4B-A429-071A0169D668}" type="datetimeFigureOut">
-              <a:t>2026. 05. 07.</a:t>
+              <a:t>2026. 05. 20.</a:t>
             </a:fld>
             <a:endParaRPr lang="en-HU"/>
           </a:p>
@@ -3348,7 +3348,12 @@
             <p:ph type="ctrTitle"/>
           </p:nvPr>
         </p:nvSpPr>
-        <p:spPr/>
+        <p:spPr>
+          <a:xfrm>
+            <a:off x="1524000" y="1122363"/>
+            <a:ext cx="9144000" cy="2387600"/>
+          </a:xfrm>
+        </p:spPr>
         <p:txBody>
           <a:bodyPr>
             <a:normAutofit fontScale="90000"/>
@@ -3364,10 +3369,10 @@
       </p:sp>
       <p:sp>
         <p:nvSpPr>
-          <p:cNvPr id="3" name="Subtitle 2">
-            <a:extLst>
-              <a:ext uri="{FF2B5EF4-FFF2-40B4-BE49-F238E27FC236}">
-                <a16:creationId xmlns:a16="http://schemas.microsoft.com/office/drawing/2014/main" id="{5F586BBD-D420-A124-5F51-EE4691F5C19D}"/>
+          <p:cNvPr id="5" name="Subtitle 4">
+            <a:extLst>
+              <a:ext uri="{FF2B5EF4-FFF2-40B4-BE49-F238E27FC236}">
+                <a16:creationId xmlns:a16="http://schemas.microsoft.com/office/drawing/2014/main" id="{E261772E-EAEE-AA45-5E09-25EF793EA527}"/>
               </a:ext>
             </a:extLst>
           </p:cNvPr>
@@ -3433,7 +3438,12 @@
             <p:ph type="title"/>
           </p:nvPr>
         </p:nvSpPr>
-        <p:spPr/>
+        <p:spPr>
+          <a:xfrm>
+            <a:off x="838200" y="365125"/>
+            <a:ext cx="10515600" cy="1325563"/>
+          </a:xfrm>
+        </p:spPr>
         <p:txBody>
           <a:bodyPr/>
           <a:lstStyle/>
@@ -3461,21 +3471,26 @@
             <p:ph idx="1"/>
           </p:nvPr>
         </p:nvSpPr>
-        <p:spPr/>
+        <p:spPr>
+          <a:xfrm>
+            <a:off x="838200" y="1825625"/>
+            <a:ext cx="10515600" cy="4351338"/>
+          </a:xfrm>
+        </p:spPr>
         <p:txBody>
           <a:bodyPr/>
           <a:lstStyle/>
           <a:p>
             <a:r>
               <a:rPr lang="en-HU"/>
-              <a:t>napi egybefüggő, közepes tempójú, legalább 30-45 perc séta – heti 150-300 perc</a:t>
+              <a:t>napi egybefüggő, közepes tempójú, legalább 30-45 perc gyaloglás – összesen heti 150-300 perc</a:t>
             </a:r>
           </a:p>
           <a:p>
             <a:pPr lvl="1"/>
             <a:r>
               <a:rPr lang="en-HU"/>
-              <a:t>de nem kutyasétáltatás, kirakat nézés vagy fagylaltozás</a:t>
+              <a:t>de nem kirakat nézés vagy fagylaltozás</a:t>
             </a:r>
           </a:p>
           <a:p>
@@ -3503,14 +3518,9 @@
           <a:p>
             <a:pPr lvl="1"/>
             <a:r>
-              <a:rPr lang="en-HU" u="sng"/>
-              <a:t>ÉTKEZÉS NAPLÓZÁSA</a:t>
-            </a:r>
-            <a:r>
               <a:rPr lang="en-HU"/>
-              <a:t> – Lavinia, Yazio, Kalóriabázis, kockás füzet</a:t>
-            </a:r>
-            <a:endParaRPr lang="en-HU" u="sng"/>
+              <a:t>ÉTKEZÉS NAPLÓZÁSA – Lavinia, Yazio, Kalóriabázis, kockás füzet</a:t>
+            </a:r>
           </a:p>
         </p:txBody>
       </p:sp>
@@ -3546,10 +3556,10 @@
       </p:grpSpPr>
       <p:sp>
         <p:nvSpPr>
-          <p:cNvPr id="2" name="Title 1">
-            <a:extLst>
-              <a:ext uri="{FF2B5EF4-FFF2-40B4-BE49-F238E27FC236}">
-                <a16:creationId xmlns:a16="http://schemas.microsoft.com/office/drawing/2014/main" id="{AEABCE08-1B1D-43DB-CCA8-A39AEA7FFEBE}"/>
+          <p:cNvPr id="5" name="Title 4">
+            <a:extLst>
+              <a:ext uri="{FF2B5EF4-FFF2-40B4-BE49-F238E27FC236}">
+                <a16:creationId xmlns:a16="http://schemas.microsoft.com/office/drawing/2014/main" id="{2169946E-27D9-44E9-4C4E-7AB466ECBF58}"/>
               </a:ext>
             </a:extLst>
           </p:cNvPr>
@@ -3585,7 +3595,12 @@
             <p:ph idx="1"/>
           </p:nvPr>
         </p:nvSpPr>
-        <p:spPr/>
+        <p:spPr>
+          <a:xfrm>
+            <a:off x="838200" y="1825625"/>
+            <a:ext cx="10515600" cy="4351338"/>
+          </a:xfrm>
+        </p:spPr>
         <p:txBody>
           <a:bodyPr/>
           <a:lstStyle/>
@@ -3677,10 +3692,10 @@
       </p:grpSpPr>
       <p:sp>
         <p:nvSpPr>
-          <p:cNvPr id="2" name="Title 1">
-            <a:extLst>
-              <a:ext uri="{FF2B5EF4-FFF2-40B4-BE49-F238E27FC236}">
-                <a16:creationId xmlns:a16="http://schemas.microsoft.com/office/drawing/2014/main" id="{73E33182-9D41-56A1-BC0E-1F9322EC6114}"/>
+          <p:cNvPr id="5" name="Title 4">
+            <a:extLst>
+              <a:ext uri="{FF2B5EF4-FFF2-40B4-BE49-F238E27FC236}">
+                <a16:creationId xmlns:a16="http://schemas.microsoft.com/office/drawing/2014/main" id="{E82D763F-D9CC-004B-739D-6EA45D7EF344}"/>
               </a:ext>
             </a:extLst>
           </p:cNvPr>
@@ -3716,7 +3731,12 @@
             <p:ph idx="1"/>
           </p:nvPr>
         </p:nvSpPr>
-        <p:spPr/>
+        <p:spPr>
+          <a:xfrm>
+            <a:off x="838200" y="1825625"/>
+            <a:ext cx="10515600" cy="4351338"/>
+          </a:xfrm>
+        </p:spPr>
         <p:txBody>
           <a:bodyPr/>
           <a:lstStyle/>
@@ -3846,13 +3866,18 @@
             <p:ph type="title"/>
           </p:nvPr>
         </p:nvSpPr>
-        <p:spPr/>
-        <p:txBody>
-          <a:bodyPr/>
-          <a:lstStyle/>
-          <a:p>
-            <a:r>
-              <a:rPr lang="hu-HU" b="1"/>
+        <p:spPr>
+          <a:xfrm>
+            <a:off x="838200" y="365125"/>
+            <a:ext cx="10515600" cy="1325563"/>
+          </a:xfrm>
+        </p:spPr>
+        <p:txBody>
+          <a:bodyPr/>
+          <a:lstStyle/>
+          <a:p>
+            <a:r>
+              <a:rPr lang="hu-HU"/>
               <a:t>Mire valók ezek a gyógyszerek?</a:t>
             </a:r>
             <a:endParaRPr lang="en-HU"/>
@@ -3875,7 +3900,12 @@
             <p:ph idx="1"/>
           </p:nvPr>
         </p:nvSpPr>
-        <p:spPr/>
+        <p:spPr>
+          <a:xfrm>
+            <a:off x="838200" y="1825625"/>
+            <a:ext cx="10515600" cy="4351338"/>
+          </a:xfrm>
+        </p:spPr>
         <p:txBody>
           <a:bodyPr/>
           <a:lstStyle/>
@@ -3887,9 +3917,7 @@
             <a:endParaRPr lang="en-HU"/>
           </a:p>
           <a:p>
-            <a:endParaRPr lang="en-HU">
-              <a:effectLst/>
-            </a:endParaRPr>
+            <a:endParaRPr lang="en-HU"/>
           </a:p>
           <a:p>
             <a:r>
@@ -3898,15 +3926,11 @@
             </a:r>
           </a:p>
           <a:p>
-            <a:endParaRPr lang="en-HU">
-              <a:effectLst/>
-            </a:endParaRPr>
-          </a:p>
-          <a:p>
-            <a:r>
-              <a:rPr lang="en-HU">
-                <a:effectLst/>
-              </a:rPr>
+            <a:endParaRPr lang="en-HU"/>
+          </a:p>
+          <a:p>
+            <a:r>
+              <a:rPr lang="en-HU"/>
               <a:t>további előnyös hatások: vércukor-, vérzsír anyagcsere, vesevédelem, zsírmáj, alvási apnoe szindróma</a:t>
             </a:r>
           </a:p>
@@ -3958,13 +3982,18 @@
             <p:ph type="title"/>
           </p:nvPr>
         </p:nvSpPr>
-        <p:spPr/>
-        <p:txBody>
-          <a:bodyPr/>
-          <a:lstStyle/>
-          <a:p>
-            <a:r>
-              <a:rPr lang="en-HU" b="1"/>
+        <p:spPr>
+          <a:xfrm>
+            <a:off x="838200" y="365125"/>
+            <a:ext cx="10515600" cy="1325563"/>
+          </a:xfrm>
+        </p:spPr>
+        <p:txBody>
+          <a:bodyPr/>
+          <a:lstStyle/>
+          <a:p>
+            <a:r>
+              <a:rPr lang="en-HU"/>
               <a:t>Ellenjavallatok</a:t>
             </a:r>
           </a:p>
@@ -3986,91 +4015,63 @@
             <p:ph idx="1"/>
           </p:nvPr>
         </p:nvSpPr>
-        <p:spPr/>
+        <p:spPr>
+          <a:xfrm>
+            <a:off x="838200" y="1825625"/>
+            <a:ext cx="10515600" cy="4351338"/>
+          </a:xfrm>
+        </p:spPr>
         <p:txBody>
           <a:bodyPr>
             <a:normAutofit lnSpcReduction="10000"/>
           </a:bodyPr>
           <a:lstStyle/>
           <a:p>
-            <a:pPr>
-              <a:buFontTx/>
-              <a:buChar char="-"/>
-            </a:pPr>
             <a:r>
               <a:rPr lang="en-HU"/>
               <a:t>terhesség, szoptatás</a:t>
             </a:r>
           </a:p>
           <a:p>
-            <a:pPr>
-              <a:buFontTx/>
-              <a:buChar char="-"/>
-            </a:pPr>
             <a:r>
               <a:rPr lang="en-HU"/>
               <a:t>bizonyos típusú pajzsmirigyrákok</a:t>
             </a:r>
           </a:p>
           <a:p>
-            <a:pPr>
-              <a:buFontTx/>
-              <a:buChar char="-"/>
-            </a:pPr>
             <a:r>
               <a:rPr lang="en-HU"/>
               <a:t>ún. MEN-2 szindróma (öröklődő pajzsmirigy + mellékvese daganat)</a:t>
             </a:r>
           </a:p>
           <a:p>
-            <a:pPr>
-              <a:buFontTx/>
-              <a:buChar char="-"/>
-            </a:pPr>
             <a:r>
               <a:rPr lang="en-HU"/>
               <a:t>bizonyos típusú hasnyálmirigy gyulladás az előzményben</a:t>
             </a:r>
           </a:p>
           <a:p>
-            <a:pPr marL="0" indent="0">
-              <a:buNone/>
-            </a:pPr>
-            <a:endParaRPr lang="en-HU" b="1"/>
-          </a:p>
-          <a:p>
-            <a:pPr marL="0" indent="0">
-              <a:buNone/>
-            </a:pPr>
-            <a:r>
-              <a:rPr lang="en-HU" b="1"/>
+            <a:endParaRPr lang="en-HU"/>
+          </a:p>
+          <a:p>
+            <a:r>
+              <a:rPr lang="en-HU"/>
               <a:t>Ritka, de fontos kezelés alatti kockázatok</a:t>
             </a:r>
           </a:p>
           <a:p>
-            <a:pPr>
-              <a:buFontTx/>
-              <a:buChar char="-"/>
-            </a:pPr>
             <a:r>
               <a:rPr lang="en-HU"/>
               <a:t>hasnyálmirigy gyulladás – erős, övszerű hasi fájdalom hányással</a:t>
             </a:r>
           </a:p>
           <a:p>
-            <a:pPr>
-              <a:buFontTx/>
-              <a:buChar char="-"/>
-            </a:pPr>
             <a:r>
               <a:rPr lang="en-HU"/>
               <a:t>egyoldali fájdalmatlan látásvesztés</a:t>
             </a:r>
           </a:p>
           <a:p>
-            <a:pPr marL="0" indent="0">
-              <a:buNone/>
-            </a:pPr>
             <a:endParaRPr lang="en-HU"/>
           </a:p>
         </p:txBody>
@@ -4121,13 +4122,18 @@
             <p:ph type="title"/>
           </p:nvPr>
         </p:nvSpPr>
-        <p:spPr/>
-        <p:txBody>
-          <a:bodyPr/>
-          <a:lstStyle/>
-          <a:p>
-            <a:r>
-              <a:rPr lang="hu-HU" b="1"/>
+        <p:spPr>
+          <a:xfrm>
+            <a:off x="838200" y="365125"/>
+            <a:ext cx="10515600" cy="1325563"/>
+          </a:xfrm>
+        </p:spPr>
+        <p:txBody>
+          <a:bodyPr/>
+          <a:lstStyle/>
+          <a:p>
+            <a:r>
+              <a:rPr lang="hu-HU"/>
               <a:t>Gyakoribb mellékhatások</a:t>
             </a:r>
             <a:endParaRPr lang="en-HU"/>
@@ -4150,58 +4156,45 @@
             <p:ph idx="1"/>
           </p:nvPr>
         </p:nvSpPr>
-        <p:spPr/>
+        <p:spPr>
+          <a:xfrm>
+            <a:off x="838200" y="1825625"/>
+            <a:ext cx="10515600" cy="4351338"/>
+          </a:xfrm>
+        </p:spPr>
         <p:txBody>
           <a:bodyPr>
             <a:normAutofit/>
           </a:bodyPr>
           <a:lstStyle/>
           <a:p>
-            <a:pPr marL="0" indent="0">
-              <a:buNone/>
-            </a:pPr>
-            <a:endParaRPr lang="en-HU"/>
-          </a:p>
-          <a:p>
-            <a:pPr marL="0" indent="0">
-              <a:buNone/>
-            </a:pPr>
+            <a:endParaRPr lang="en-HU"/>
+          </a:p>
+          <a:p>
             <a:r>
               <a:rPr lang="en-HU"/>
               <a:t>Hányinger, hányás</a:t>
             </a:r>
           </a:p>
           <a:p>
-            <a:pPr marL="0" indent="0">
-              <a:buNone/>
-            </a:pPr>
             <a:r>
               <a:rPr lang="en-HU"/>
               <a:t>Hasmenés vagy székrekedés</a:t>
             </a:r>
           </a:p>
           <a:p>
-            <a:pPr marL="0" indent="0">
-              <a:buNone/>
-            </a:pPr>
             <a:r>
               <a:rPr lang="en-HU"/>
               <a:t>Puffadás vagy teltségérzés</a:t>
             </a:r>
           </a:p>
           <a:p>
-            <a:pPr marL="0" indent="0">
-              <a:buNone/>
-            </a:pPr>
             <a:r>
               <a:rPr lang="en-HU"/>
               <a:t>Fáradtság</a:t>
             </a:r>
           </a:p>
           <a:p>
-            <a:pPr marL="0" indent="0">
-              <a:buNone/>
-            </a:pPr>
             <a:r>
               <a:rPr lang="en-HU"/>
               <a:t>Hajhullás</a:t>
@@ -4255,13 +4248,18 @@
             <p:ph type="title"/>
           </p:nvPr>
         </p:nvSpPr>
-        <p:spPr/>
-        <p:txBody>
-          <a:bodyPr/>
-          <a:lstStyle/>
-          <a:p>
-            <a:r>
-              <a:rPr lang="en-HU" b="1"/>
+        <p:spPr>
+          <a:xfrm>
+            <a:off x="838200" y="365125"/>
+            <a:ext cx="10515600" cy="1325563"/>
+          </a:xfrm>
+        </p:spPr>
+        <p:txBody>
+          <a:bodyPr/>
+          <a:lstStyle/>
+          <a:p>
+            <a:r>
+              <a:rPr lang="en-HU"/>
               <a:t>Mire kell figyelni?</a:t>
             </a:r>
           </a:p>
@@ -4283,7 +4281,12 @@
             <p:ph idx="1"/>
           </p:nvPr>
         </p:nvSpPr>
-        <p:spPr/>
+        <p:spPr>
+          <a:xfrm>
+            <a:off x="838200" y="1825625"/>
+            <a:ext cx="10515600" cy="4351338"/>
+          </a:xfrm>
+        </p:spPr>
         <p:txBody>
           <a:bodyPr>
             <a:normAutofit/>
@@ -4364,13 +4367,18 @@
             <p:ph type="title"/>
           </p:nvPr>
         </p:nvSpPr>
-        <p:spPr/>
-        <p:txBody>
-          <a:bodyPr/>
-          <a:lstStyle/>
-          <a:p>
-            <a:r>
-              <a:rPr lang="en-HU" b="1"/>
+        <p:spPr>
+          <a:xfrm>
+            <a:off x="838200" y="365125"/>
+            <a:ext cx="10515600" cy="1325563"/>
+          </a:xfrm>
+        </p:spPr>
+        <p:txBody>
+          <a:bodyPr/>
+          <a:lstStyle/>
+          <a:p>
+            <a:r>
+              <a:rPr lang="en-HU"/>
               <a:t>Hatóanyagok</a:t>
             </a:r>
           </a:p>
@@ -4392,62 +4400,46 @@
             <p:ph idx="1"/>
           </p:nvPr>
         </p:nvSpPr>
-        <p:spPr/>
-        <p:txBody>
-          <a:bodyPr/>
-          <a:lstStyle/>
-          <a:p>
-            <a:pPr marL="0" indent="0">
-              <a:buNone/>
-            </a:pPr>
+        <p:spPr>
+          <a:xfrm>
+            <a:off x="838200" y="1825625"/>
+            <a:ext cx="10515600" cy="4351338"/>
+          </a:xfrm>
+        </p:spPr>
+        <p:txBody>
+          <a:bodyPr/>
+          <a:lstStyle/>
+          <a:p>
             <a:r>
               <a:rPr lang="en-HU"/>
               <a:t>Saxenda	napi 1X inj.				(liraglutid)</a:t>
             </a:r>
           </a:p>
           <a:p>
-            <a:pPr marL="0" indent="0">
-              <a:buNone/>
-            </a:pPr>
-            <a:endParaRPr lang="en-HU"/>
-          </a:p>
-          <a:p>
-            <a:pPr marL="0" indent="0">
-              <a:buNone/>
-            </a:pPr>
+            <a:endParaRPr lang="en-HU"/>
+          </a:p>
+          <a:p>
             <a:r>
               <a:rPr lang="en-HU"/>
               <a:t>Wegovy	heti 1X inj.				(semaglutid)	</a:t>
             </a:r>
           </a:p>
           <a:p>
-            <a:pPr marL="0" indent="0">
-              <a:buNone/>
-            </a:pPr>
             <a:r>
               <a:rPr lang="en-HU"/>
               <a:t>Ozempic</a:t>
             </a:r>
           </a:p>
           <a:p>
-            <a:pPr marL="0" indent="0">
-              <a:buNone/>
-            </a:pPr>
             <a:r>
               <a:rPr lang="en-HU"/>
               <a:t>Rybelsus	napi 1 tbl éhgyomorra</a:t>
             </a:r>
           </a:p>
           <a:p>
-            <a:pPr marL="0" indent="0">
-              <a:buNone/>
-            </a:pPr>
-            <a:endParaRPr lang="en-HU"/>
-          </a:p>
-          <a:p>
-            <a:pPr marL="0" indent="0">
-              <a:buNone/>
-            </a:pPr>
+            <a:endParaRPr lang="en-HU"/>
+          </a:p>
+          <a:p>
             <a:r>
               <a:rPr lang="en-HU"/>
               <a:t>Mounjaro	heti 1X inj.				(tirzepatid)</a:t>
@@ -4545,6 +4537,31 @@
           </a:prstGeom>
         </p:spPr>
       </p:pic>
+      <p:sp>
+        <p:nvSpPr>
+          <p:cNvPr id="2" name="Title 1">
+            <a:extLst>
+              <a:ext uri="{FF2B5EF4-FFF2-40B4-BE49-F238E27FC236}">
+                <a16:creationId xmlns:a16="http://schemas.microsoft.com/office/drawing/2014/main" id="{E478A30C-3094-89D4-53A2-DF29668B11CC}"/>
+              </a:ext>
+            </a:extLst>
+          </p:cNvPr>
+          <p:cNvSpPr>
+            <a:spLocks noGrp="1"/>
+          </p:cNvSpPr>
+          <p:nvPr>
+            <p:ph type="title"/>
+          </p:nvPr>
+        </p:nvSpPr>
+        <p:spPr/>
+        <p:txBody>
+          <a:bodyPr/>
+          <a:lstStyle/>
+          <a:p>
+            <a:endParaRPr lang="en-HU"/>
+          </a:p>
+        </p:txBody>
+      </p:sp>
     </p:spTree>
     <p:extLst>
       <p:ext uri="{BB962C8B-B14F-4D97-AF65-F5344CB8AC3E}">

--- a/Testsúlycsökkentő gyógyszeres terápiák.pptx
+++ b/Testsúlycsökkentő gyógyszeres terápiák.pptx
@@ -269,7 +269,7 @@
           <a:lstStyle/>
           <a:p>
             <a:fld id="{8C9917DF-FD8E-5A4B-A429-071A0169D668}" type="datetimeFigureOut">
-              <a:t>2026. 05. 20.</a:t>
+              <a:t>2026. 06. 02.</a:t>
             </a:fld>
             <a:endParaRPr lang="en-HU"/>
           </a:p>
@@ -467,7 +467,7 @@
           <a:lstStyle/>
           <a:p>
             <a:fld id="{8C9917DF-FD8E-5A4B-A429-071A0169D668}" type="datetimeFigureOut">
-              <a:t>2026. 05. 20.</a:t>
+              <a:t>2026. 06. 02.</a:t>
             </a:fld>
             <a:endParaRPr lang="en-HU"/>
           </a:p>
@@ -675,7 +675,7 @@
           <a:lstStyle/>
           <a:p>
             <a:fld id="{8C9917DF-FD8E-5A4B-A429-071A0169D668}" type="datetimeFigureOut">
-              <a:t>2026. 05. 20.</a:t>
+              <a:t>2026. 06. 02.</a:t>
             </a:fld>
             <a:endParaRPr lang="en-HU"/>
           </a:p>
@@ -873,7 +873,7 @@
           <a:lstStyle/>
           <a:p>
             <a:fld id="{8C9917DF-FD8E-5A4B-A429-071A0169D668}" type="datetimeFigureOut">
-              <a:t>2026. 05. 20.</a:t>
+              <a:t>2026. 06. 02.</a:t>
             </a:fld>
             <a:endParaRPr lang="en-HU"/>
           </a:p>
@@ -1147,7 +1147,7 @@
           <a:lstStyle/>
           <a:p>
             <a:fld id="{8C9917DF-FD8E-5A4B-A429-071A0169D668}" type="datetimeFigureOut">
-              <a:t>2026. 05. 20.</a:t>
+              <a:t>2026. 06. 02.</a:t>
             </a:fld>
             <a:endParaRPr lang="en-HU"/>
           </a:p>
@@ -1413,7 +1413,7 @@
           <a:lstStyle/>
           <a:p>
             <a:fld id="{8C9917DF-FD8E-5A4B-A429-071A0169D668}" type="datetimeFigureOut">
-              <a:t>2026. 05. 20.</a:t>
+              <a:t>2026. 06. 02.</a:t>
             </a:fld>
             <a:endParaRPr lang="en-HU"/>
           </a:p>
@@ -1826,7 +1826,7 @@
           <a:lstStyle/>
           <a:p>
             <a:fld id="{8C9917DF-FD8E-5A4B-A429-071A0169D668}" type="datetimeFigureOut">
-              <a:t>2026. 05. 20.</a:t>
+              <a:t>2026. 06. 02.</a:t>
             </a:fld>
             <a:endParaRPr lang="en-HU"/>
           </a:p>
@@ -1966,7 +1966,7 @@
           <a:lstStyle/>
           <a:p>
             <a:fld id="{8C9917DF-FD8E-5A4B-A429-071A0169D668}" type="datetimeFigureOut">
-              <a:t>2026. 05. 20.</a:t>
+              <a:t>2026. 06. 02.</a:t>
             </a:fld>
             <a:endParaRPr lang="en-HU"/>
           </a:p>
@@ -2077,7 +2077,7 @@
           <a:lstStyle/>
           <a:p>
             <a:fld id="{8C9917DF-FD8E-5A4B-A429-071A0169D668}" type="datetimeFigureOut">
-              <a:t>2026. 05. 20.</a:t>
+              <a:t>2026. 06. 02.</a:t>
             </a:fld>
             <a:endParaRPr lang="en-HU"/>
           </a:p>
@@ -2388,7 +2388,7 @@
           <a:lstStyle/>
           <a:p>
             <a:fld id="{8C9917DF-FD8E-5A4B-A429-071A0169D668}" type="datetimeFigureOut">
-              <a:t>2026. 05. 20.</a:t>
+              <a:t>2026. 06. 02.</a:t>
             </a:fld>
             <a:endParaRPr lang="en-HU"/>
           </a:p>
@@ -2675,7 +2675,7 @@
           <a:lstStyle/>
           <a:p>
             <a:fld id="{8C9917DF-FD8E-5A4B-A429-071A0169D668}" type="datetimeFigureOut">
-              <a:t>2026. 05. 20.</a:t>
+              <a:t>2026. 06. 02.</a:t>
             </a:fld>
             <a:endParaRPr lang="en-HU"/>
           </a:p>
@@ -2801,10 +2801,10 @@
           <a:lstStyle/>
           <a:p>
             <a:r>
-              <a:rPr lang="en-GB"/>
+              <a:rPr lang="en-GB" dirty="0"/>
               <a:t>Click to edit Master title style</a:t>
             </a:r>
-            <a:endParaRPr lang="en-HU"/>
+            <a:endParaRPr lang="en-HU" dirty="0"/>
           </a:p>
         </p:txBody>
       </p:sp>
@@ -2841,38 +2841,38 @@
           <a:p>
             <a:pPr lvl="0"/>
             <a:r>
-              <a:rPr lang="en-GB"/>
+              <a:rPr lang="en-GB" dirty="0"/>
               <a:t>Click to edit Master text styles</a:t>
             </a:r>
           </a:p>
           <a:p>
             <a:pPr lvl="1"/>
             <a:r>
-              <a:rPr lang="en-GB"/>
+              <a:rPr lang="en-GB" dirty="0"/>
               <a:t>Second level</a:t>
             </a:r>
           </a:p>
           <a:p>
             <a:pPr lvl="2"/>
             <a:r>
-              <a:rPr lang="en-GB"/>
+              <a:rPr lang="en-GB" dirty="0"/>
               <a:t>Third level</a:t>
             </a:r>
           </a:p>
           <a:p>
             <a:pPr lvl="3"/>
             <a:r>
-              <a:rPr lang="en-GB"/>
+              <a:rPr lang="en-GB" dirty="0"/>
               <a:t>Fourth level</a:t>
             </a:r>
           </a:p>
           <a:p>
             <a:pPr lvl="4"/>
             <a:r>
-              <a:rPr lang="en-GB"/>
+              <a:rPr lang="en-GB" dirty="0"/>
               <a:t>Fifth level</a:t>
             </a:r>
-            <a:endParaRPr lang="en-HU"/>
+            <a:endParaRPr lang="en-HU" dirty="0"/>
           </a:p>
         </p:txBody>
       </p:sp>
@@ -2905,20 +2905,23 @@
           <a:bodyPr vert="horz" lIns="91440" tIns="45720" rIns="91440" bIns="45720" rtlCol="0" anchor="ctr"/>
           <a:lstStyle>
             <a:lvl1pPr algn="l">
-              <a:defRPr sz="1200">
+              <a:defRPr sz="1200" b="0" i="0">
                 <a:solidFill>
                   <a:schemeClr val="tx1">
                     <a:tint val="82000"/>
                   </a:schemeClr>
                 </a:solidFill>
+                <a:latin typeface="Arial" panose="020B0604020202020204" pitchFamily="34" charset="0"/>
               </a:defRPr>
             </a:lvl1pPr>
           </a:lstStyle>
           <a:p>
             <a:fld id="{8C9917DF-FD8E-5A4B-A429-071A0169D668}" type="datetimeFigureOut">
-              <a:t>2026. 05. 20.</a:t>
+              <a:rPr lang="en-HU" smtClean="0"/>
+              <a:pPr/>
+              <a:t>2026. 06. 02.</a:t>
             </a:fld>
-            <a:endParaRPr lang="en-HU"/>
+            <a:endParaRPr lang="en-HU" dirty="0"/>
           </a:p>
         </p:txBody>
       </p:sp>
@@ -2951,17 +2954,18 @@
           <a:bodyPr vert="horz" lIns="91440" tIns="45720" rIns="91440" bIns="45720" rtlCol="0" anchor="ctr"/>
           <a:lstStyle>
             <a:lvl1pPr algn="ctr">
-              <a:defRPr sz="1200">
+              <a:defRPr sz="1200" b="0" i="0">
                 <a:solidFill>
                   <a:schemeClr val="tx1">
                     <a:tint val="82000"/>
                   </a:schemeClr>
                 </a:solidFill>
+                <a:latin typeface="Arial" panose="020B0604020202020204" pitchFamily="34" charset="0"/>
               </a:defRPr>
             </a:lvl1pPr>
           </a:lstStyle>
           <a:p>
-            <a:endParaRPr lang="en-HU"/>
+            <a:endParaRPr lang="en-HU" dirty="0"/>
           </a:p>
         </p:txBody>
       </p:sp>
@@ -2994,20 +2998,23 @@
           <a:bodyPr vert="horz" lIns="91440" tIns="45720" rIns="91440" bIns="45720" rtlCol="0" anchor="ctr"/>
           <a:lstStyle>
             <a:lvl1pPr algn="r">
-              <a:defRPr sz="1200">
+              <a:defRPr sz="1200" b="0" i="0">
                 <a:solidFill>
                   <a:schemeClr val="tx1">
                     <a:tint val="82000"/>
                   </a:schemeClr>
                 </a:solidFill>
+                <a:latin typeface="Arial" panose="020B0604020202020204" pitchFamily="34" charset="0"/>
               </a:defRPr>
             </a:lvl1pPr>
           </a:lstStyle>
           <a:p>
             <a:fld id="{A237CD53-027F-5C48-8DB3-DC9CB93328AF}" type="slidenum">
+              <a:rPr lang="en-HU" smtClean="0"/>
+              <a:pPr/>
               <a:t>‹#›</a:t>
             </a:fld>
-            <a:endParaRPr lang="en-HU"/>
+            <a:endParaRPr lang="en-HU" dirty="0"/>
           </a:p>
         </p:txBody>
       </p:sp>
@@ -3042,11 +3049,11 @@
           <a:spcPct val="0"/>
         </a:spcBef>
         <a:buNone/>
-        <a:defRPr sz="4400" kern="1200">
+        <a:defRPr sz="4400" b="0" i="0" kern="1200">
           <a:solidFill>
             <a:schemeClr val="tx1"/>
           </a:solidFill>
-          <a:latin typeface="+mj-lt"/>
+          <a:latin typeface="Arial" panose="020B0604020202020204" pitchFamily="34" charset="0"/>
           <a:ea typeface="+mj-ea"/>
           <a:cs typeface="+mj-cs"/>
         </a:defRPr>
@@ -3062,11 +3069,11 @@
         </a:spcBef>
         <a:buFont typeface="Arial" panose="020B0604020202020204" pitchFamily="34" charset="0"/>
         <a:buChar char="•"/>
-        <a:defRPr sz="2800" kern="1200">
+        <a:defRPr sz="2800" b="0" i="0" kern="1200">
           <a:solidFill>
             <a:schemeClr val="tx1"/>
           </a:solidFill>
-          <a:latin typeface="+mn-lt"/>
+          <a:latin typeface="Arial" panose="020B0604020202020204" pitchFamily="34" charset="0"/>
           <a:ea typeface="+mn-ea"/>
           <a:cs typeface="+mn-cs"/>
         </a:defRPr>
@@ -3080,11 +3087,11 @@
         </a:spcBef>
         <a:buFont typeface="Arial" panose="020B0604020202020204" pitchFamily="34" charset="0"/>
         <a:buChar char="•"/>
-        <a:defRPr sz="2400" kern="1200">
+        <a:defRPr sz="2400" b="0" i="0" kern="1200">
           <a:solidFill>
             <a:schemeClr val="tx1"/>
           </a:solidFill>
-          <a:latin typeface="+mn-lt"/>
+          <a:latin typeface="Arial" panose="020B0604020202020204" pitchFamily="34" charset="0"/>
           <a:ea typeface="+mn-ea"/>
           <a:cs typeface="+mn-cs"/>
         </a:defRPr>
@@ -3098,11 +3105,11 @@
         </a:spcBef>
         <a:buFont typeface="Arial" panose="020B0604020202020204" pitchFamily="34" charset="0"/>
         <a:buChar char="•"/>
-        <a:defRPr sz="2000" kern="1200">
+        <a:defRPr sz="2000" b="0" i="0" kern="1200">
           <a:solidFill>
             <a:schemeClr val="tx1"/>
           </a:solidFill>
-          <a:latin typeface="+mn-lt"/>
+          <a:latin typeface="Arial" panose="020B0604020202020204" pitchFamily="34" charset="0"/>
           <a:ea typeface="+mn-ea"/>
           <a:cs typeface="+mn-cs"/>
         </a:defRPr>
@@ -3116,11 +3123,11 @@
         </a:spcBef>
         <a:buFont typeface="Arial" panose="020B0604020202020204" pitchFamily="34" charset="0"/>
         <a:buChar char="•"/>
-        <a:defRPr sz="1800" kern="1200">
+        <a:defRPr sz="1800" b="0" i="0" kern="1200">
           <a:solidFill>
             <a:schemeClr val="tx1"/>
           </a:solidFill>
-          <a:latin typeface="+mn-lt"/>
+          <a:latin typeface="Arial" panose="020B0604020202020204" pitchFamily="34" charset="0"/>
           <a:ea typeface="+mn-ea"/>
           <a:cs typeface="+mn-cs"/>
         </a:defRPr>
@@ -3134,11 +3141,11 @@
         </a:spcBef>
         <a:buFont typeface="Arial" panose="020B0604020202020204" pitchFamily="34" charset="0"/>
         <a:buChar char="•"/>
-        <a:defRPr sz="1800" kern="1200">
+        <a:defRPr sz="1800" b="0" i="0" kern="1200">
           <a:solidFill>
             <a:schemeClr val="tx1"/>
           </a:solidFill>
-          <a:latin typeface="+mn-lt"/>
+          <a:latin typeface="Arial" panose="020B0604020202020204" pitchFamily="34" charset="0"/>
           <a:ea typeface="+mn-ea"/>
           <a:cs typeface="+mn-cs"/>
         </a:defRPr>
@@ -3361,7 +3368,7 @@
           <a:lstStyle/>
           <a:p>
             <a:r>
-              <a:rPr lang="en-HU"/>
+              <a:rPr lang="en-HU" dirty="0"/>
               <a:t>Testsúlycsökkentő gyógyszeres és életmód terápiák</a:t>
             </a:r>
           </a:p>
@@ -3449,7 +3456,7 @@
           <a:lstStyle/>
           <a:p>
             <a:r>
-              <a:rPr lang="en-HU"/>
+              <a:rPr lang="en-HU" dirty="0"/>
               <a:t>Minimum életmód</a:t>
             </a:r>
           </a:p>
@@ -3482,43 +3489,43 @@
           <a:lstStyle/>
           <a:p>
             <a:r>
-              <a:rPr lang="en-HU"/>
+              <a:rPr lang="en-HU" dirty="0"/>
               <a:t>napi egybefüggő, közepes tempójú, legalább 30-45 perc gyaloglás – összesen heti 150-300 perc</a:t>
             </a:r>
           </a:p>
           <a:p>
             <a:pPr lvl="1"/>
             <a:r>
-              <a:rPr lang="en-HU"/>
+              <a:rPr lang="en-HU" dirty="0"/>
               <a:t>de nem kirakat nézés vagy fagylaltozás</a:t>
             </a:r>
           </a:p>
           <a:p>
             <a:r>
-              <a:rPr lang="en-HU"/>
+              <a:rPr lang="en-HU" dirty="0"/>
               <a:t>heti 2x30 perc rezisztencia jellegű edzés – akár kis súlyokkal pl. 1L-es ásványvizes palack, gumiszalag</a:t>
             </a:r>
           </a:p>
           <a:p>
-            <a:endParaRPr lang="en-HU"/>
-          </a:p>
-          <a:p>
-            <a:r>
-              <a:rPr lang="en-HU"/>
+            <a:endParaRPr lang="en-HU" dirty="0"/>
+          </a:p>
+          <a:p>
+            <a:r>
+              <a:rPr lang="en-HU" dirty="0"/>
               <a:t>étkezés</a:t>
             </a:r>
           </a:p>
           <a:p>
             <a:pPr lvl="1"/>
             <a:r>
-              <a:rPr lang="en-HU"/>
+              <a:rPr lang="en-HU" dirty="0"/>
               <a:t>mennyi kalória? milyen tápanyag összetétel? milyen napi eloszlásban?</a:t>
             </a:r>
           </a:p>
           <a:p>
             <a:pPr lvl="1"/>
             <a:r>
-              <a:rPr lang="en-HU"/>
+              <a:rPr lang="en-HU" dirty="0"/>
               <a:t>ÉTKEZÉS NAPLÓZÁSA – Lavinia, Yazio, Kalóriabázis, kockás füzet</a:t>
             </a:r>
           </a:p>
@@ -3575,7 +3582,7 @@
           <a:bodyPr/>
           <a:lstStyle/>
           <a:p>
-            <a:endParaRPr lang="en-HU"/>
+            <a:endParaRPr lang="en-HU" dirty="0"/>
           </a:p>
         </p:txBody>
       </p:sp>
@@ -3605,52 +3612,52 @@
           <a:bodyPr/>
           <a:lstStyle/>
           <a:p>
-            <a:endParaRPr lang="en-HU"/>
-          </a:p>
-          <a:p>
-            <a:r>
-              <a:rPr lang="en-HU"/>
+            <a:endParaRPr lang="en-HU" dirty="0"/>
+          </a:p>
+          <a:p>
+            <a:r>
+              <a:rPr lang="en-HU" dirty="0"/>
               <a:t>életmód					</a:t>
             </a:r>
             <a:r>
-              <a:rPr lang="en-HU">
+              <a:rPr lang="en-HU" dirty="0">
                 <a:sym typeface="Wingdings" pitchFamily="2" charset="2"/>
               </a:rPr>
               <a:t>  </a:t>
             </a:r>
-            <a:endParaRPr lang="en-HU"/>
-          </a:p>
-          <a:p>
-            <a:endParaRPr lang="en-HU"/>
-          </a:p>
-          <a:p>
-            <a:r>
-              <a:rPr lang="en-HU"/>
+            <a:endParaRPr lang="en-HU" dirty="0"/>
+          </a:p>
+          <a:p>
+            <a:endParaRPr lang="en-HU" dirty="0"/>
+          </a:p>
+          <a:p>
+            <a:r>
+              <a:rPr lang="en-HU" dirty="0"/>
               <a:t>gyógyszeres terápiák			</a:t>
             </a:r>
             <a:r>
-              <a:rPr lang="en-HU">
+              <a:rPr lang="en-HU" dirty="0">
                 <a:sym typeface="Wingdings" pitchFamily="2" charset="2"/>
               </a:rPr>
               <a:t>   </a:t>
             </a:r>
-            <a:endParaRPr lang="en-HU"/>
-          </a:p>
-          <a:p>
-            <a:endParaRPr lang="en-HU"/>
-          </a:p>
-          <a:p>
-            <a:r>
-              <a:rPr lang="en-HU"/>
+            <a:endParaRPr lang="en-HU" dirty="0"/>
+          </a:p>
+          <a:p>
+            <a:endParaRPr lang="en-HU" dirty="0"/>
+          </a:p>
+          <a:p>
+            <a:r>
+              <a:rPr lang="en-HU" dirty="0"/>
               <a:t>életmód + gyógyszeres terápia	</a:t>
             </a:r>
             <a:r>
-              <a:rPr lang="en-HU">
+              <a:rPr lang="en-HU" dirty="0">
                 <a:sym typeface="Wingdings" pitchFamily="2" charset="2"/>
               </a:rPr>
               <a:t>   </a:t>
             </a:r>
-            <a:endParaRPr lang="en-HU"/>
+            <a:endParaRPr lang="en-HU" dirty="0"/>
           </a:p>
         </p:txBody>
       </p:sp>
@@ -3711,7 +3718,7 @@
           <a:bodyPr/>
           <a:lstStyle/>
           <a:p>
-            <a:endParaRPr lang="en-HU"/>
+            <a:endParaRPr lang="en-HU" dirty="0"/>
           </a:p>
         </p:txBody>
       </p:sp>
@@ -3741,52 +3748,52 @@
           <a:bodyPr/>
           <a:lstStyle/>
           <a:p>
-            <a:endParaRPr lang="en-HU"/>
-          </a:p>
-          <a:p>
-            <a:r>
-              <a:rPr lang="en-HU"/>
+            <a:endParaRPr lang="en-HU" dirty="0"/>
+          </a:p>
+          <a:p>
+            <a:r>
+              <a:rPr lang="en-HU" dirty="0"/>
               <a:t>életmód					</a:t>
             </a:r>
             <a:r>
-              <a:rPr lang="en-HU">
+              <a:rPr lang="en-HU" dirty="0">
                 <a:sym typeface="Wingdings" pitchFamily="2" charset="2"/>
               </a:rPr>
               <a:t>  </a:t>
             </a:r>
-            <a:endParaRPr lang="en-HU"/>
-          </a:p>
-          <a:p>
-            <a:endParaRPr lang="en-HU"/>
-          </a:p>
-          <a:p>
-            <a:r>
-              <a:rPr lang="en-HU"/>
+            <a:endParaRPr lang="en-HU" dirty="0"/>
+          </a:p>
+          <a:p>
+            <a:endParaRPr lang="en-HU" dirty="0"/>
+          </a:p>
+          <a:p>
+            <a:r>
+              <a:rPr lang="en-HU" dirty="0"/>
               <a:t>gyógyszeres terápiák			</a:t>
             </a:r>
             <a:r>
-              <a:rPr lang="en-HU">
+              <a:rPr lang="en-HU" dirty="0">
                 <a:sym typeface="Wingdings" pitchFamily="2" charset="2"/>
               </a:rPr>
               <a:t>   </a:t>
             </a:r>
-            <a:endParaRPr lang="en-HU"/>
-          </a:p>
-          <a:p>
-            <a:endParaRPr lang="en-HU"/>
-          </a:p>
-          <a:p>
-            <a:r>
-              <a:rPr lang="en-HU"/>
+            <a:endParaRPr lang="en-HU" dirty="0"/>
+          </a:p>
+          <a:p>
+            <a:endParaRPr lang="en-HU" dirty="0"/>
+          </a:p>
+          <a:p>
+            <a:r>
+              <a:rPr lang="en-HU" dirty="0"/>
               <a:t>életmód + gyógyszeres terápia	</a:t>
             </a:r>
             <a:r>
-              <a:rPr lang="en-HU">
+              <a:rPr lang="en-HU" dirty="0">
                 <a:sym typeface="Wingdings" pitchFamily="2" charset="2"/>
               </a:rPr>
               <a:t>   </a:t>
             </a:r>
-            <a:endParaRPr lang="en-HU"/>
+            <a:endParaRPr lang="en-HU" dirty="0"/>
           </a:p>
         </p:txBody>
       </p:sp>
@@ -3877,10 +3884,10 @@
           <a:lstStyle/>
           <a:p>
             <a:r>
-              <a:rPr lang="hu-HU"/>
+              <a:rPr lang="hu-HU" dirty="0"/>
               <a:t>Mire valók ezek a gyógyszerek?</a:t>
             </a:r>
-            <a:endParaRPr lang="en-HU"/>
+            <a:endParaRPr lang="en-HU" dirty="0"/>
           </a:p>
         </p:txBody>
       </p:sp>
@@ -3911,26 +3918,26 @@
           <a:lstStyle/>
           <a:p>
             <a:r>
-              <a:rPr lang="hu-HU"/>
+              <a:rPr lang="hu-HU" dirty="0"/>
               <a:t>az étvágy csökkentésével és a jóllakottság fokozásával segítik a testsúlycsökkenést</a:t>
             </a:r>
-            <a:endParaRPr lang="en-HU"/>
-          </a:p>
-          <a:p>
-            <a:endParaRPr lang="en-HU"/>
-          </a:p>
-          <a:p>
-            <a:r>
-              <a:rPr lang="en-HU"/>
+            <a:endParaRPr lang="en-HU" dirty="0"/>
+          </a:p>
+          <a:p>
+            <a:endParaRPr lang="en-HU" dirty="0"/>
+          </a:p>
+          <a:p>
+            <a:r>
+              <a:rPr lang="en-HU" dirty="0"/>
               <a:t>egyes hatóanyagoknak kimutatott szív-érrendszeri rizikócsökkentő hatásuk is van</a:t>
             </a:r>
           </a:p>
           <a:p>
-            <a:endParaRPr lang="en-HU"/>
-          </a:p>
-          <a:p>
-            <a:r>
-              <a:rPr lang="en-HU"/>
+            <a:endParaRPr lang="en-HU" dirty="0"/>
+          </a:p>
+          <a:p>
+            <a:r>
+              <a:rPr lang="en-HU" dirty="0"/>
               <a:t>további előnyös hatások: vércukor-, vérzsír anyagcsere, vesevédelem, zsírmáj, alvási apnoe szindróma</a:t>
             </a:r>
           </a:p>
@@ -3993,7 +4000,7 @@
           <a:lstStyle/>
           <a:p>
             <a:r>
-              <a:rPr lang="en-HU"/>
+              <a:rPr lang="en-HU" dirty="0"/>
               <a:t>Ellenjavallatok</a:t>
             </a:r>
           </a:p>
@@ -4023,56 +4030,56 @@
         </p:spPr>
         <p:txBody>
           <a:bodyPr>
-            <a:normAutofit lnSpcReduction="10000"/>
+            <a:normAutofit fontScale="92500"/>
           </a:bodyPr>
           <a:lstStyle/>
           <a:p>
             <a:r>
-              <a:rPr lang="en-HU"/>
+              <a:rPr lang="en-HU" dirty="0"/>
               <a:t>terhesség, szoptatás</a:t>
             </a:r>
           </a:p>
           <a:p>
             <a:r>
-              <a:rPr lang="en-HU"/>
+              <a:rPr lang="en-HU" dirty="0"/>
               <a:t>bizonyos típusú pajzsmirigyrákok</a:t>
             </a:r>
           </a:p>
           <a:p>
             <a:r>
-              <a:rPr lang="en-HU"/>
+              <a:rPr lang="en-HU" dirty="0"/>
               <a:t>ún. MEN-2 szindróma (öröklődő pajzsmirigy + mellékvese daganat)</a:t>
             </a:r>
           </a:p>
           <a:p>
             <a:r>
-              <a:rPr lang="en-HU"/>
+              <a:rPr lang="en-HU" dirty="0"/>
               <a:t>bizonyos típusú hasnyálmirigy gyulladás az előzményben</a:t>
             </a:r>
           </a:p>
           <a:p>
-            <a:endParaRPr lang="en-HU"/>
-          </a:p>
-          <a:p>
-            <a:r>
-              <a:rPr lang="en-HU"/>
+            <a:endParaRPr lang="en-HU" dirty="0"/>
+          </a:p>
+          <a:p>
+            <a:r>
+              <a:rPr lang="en-HU" dirty="0"/>
               <a:t>Ritka, de fontos kezelés alatti kockázatok</a:t>
             </a:r>
           </a:p>
           <a:p>
             <a:r>
-              <a:rPr lang="en-HU"/>
+              <a:rPr lang="en-HU" dirty="0"/>
               <a:t>hasnyálmirigy gyulladás – erős, övszerű hasi fájdalom hányással</a:t>
             </a:r>
           </a:p>
           <a:p>
             <a:r>
-              <a:rPr lang="en-HU"/>
+              <a:rPr lang="en-HU" dirty="0"/>
               <a:t>egyoldali fájdalmatlan látásvesztés</a:t>
             </a:r>
           </a:p>
           <a:p>
-            <a:endParaRPr lang="en-HU"/>
+            <a:endParaRPr lang="en-HU" dirty="0"/>
           </a:p>
         </p:txBody>
       </p:sp>
@@ -4133,10 +4140,10 @@
           <a:lstStyle/>
           <a:p>
             <a:r>
-              <a:rPr lang="hu-HU"/>
+              <a:rPr lang="hu-HU" dirty="0"/>
               <a:t>Gyakoribb mellékhatások</a:t>
             </a:r>
-            <a:endParaRPr lang="en-HU"/>
+            <a:endParaRPr lang="en-HU" dirty="0"/>
           </a:p>
         </p:txBody>
       </p:sp>
@@ -4168,35 +4175,35 @@
           </a:bodyPr>
           <a:lstStyle/>
           <a:p>
-            <a:endParaRPr lang="en-HU"/>
-          </a:p>
-          <a:p>
-            <a:r>
-              <a:rPr lang="en-HU"/>
+            <a:endParaRPr lang="en-HU" dirty="0"/>
+          </a:p>
+          <a:p>
+            <a:r>
+              <a:rPr lang="en-HU" dirty="0"/>
               <a:t>Hányinger, hányás</a:t>
             </a:r>
           </a:p>
           <a:p>
             <a:r>
-              <a:rPr lang="en-HU"/>
+              <a:rPr lang="en-HU" dirty="0"/>
               <a:t>Hasmenés vagy székrekedés</a:t>
             </a:r>
           </a:p>
           <a:p>
             <a:r>
-              <a:rPr lang="en-HU"/>
+              <a:rPr lang="en-HU" dirty="0"/>
               <a:t>Puffadás vagy teltségérzés</a:t>
             </a:r>
           </a:p>
           <a:p>
             <a:r>
-              <a:rPr lang="en-HU"/>
+              <a:rPr lang="en-HU" dirty="0"/>
               <a:t>Fáradtság</a:t>
             </a:r>
           </a:p>
           <a:p>
             <a:r>
-              <a:rPr lang="en-HU"/>
+              <a:rPr lang="en-HU" dirty="0"/>
               <a:t>Hajhullás</a:t>
             </a:r>
           </a:p>
@@ -4259,7 +4266,7 @@
           <a:lstStyle/>
           <a:p>
             <a:r>
-              <a:rPr lang="en-HU"/>
+              <a:rPr lang="en-HU" dirty="0"/>
               <a:t>Mire kell figyelni?</a:t>
             </a:r>
           </a:p>
@@ -4293,29 +4300,29 @@
           </a:bodyPr>
           <a:lstStyle/>
           <a:p>
-            <a:endParaRPr lang="en-HU"/>
-          </a:p>
-          <a:p>
-            <a:endParaRPr lang="en-HU"/>
-          </a:p>
-          <a:p>
-            <a:r>
-              <a:rPr lang="en-HU"/>
+            <a:endParaRPr lang="en-HU" dirty="0"/>
+          </a:p>
+          <a:p>
+            <a:endParaRPr lang="en-HU" dirty="0"/>
+          </a:p>
+          <a:p>
+            <a:r>
+              <a:rPr lang="en-HU" dirty="0"/>
               <a:t>nagy volumenű étkezés, alkoholfogyasztás ne legyen</a:t>
             </a:r>
           </a:p>
           <a:p>
             <a:r>
-              <a:rPr lang="en-HU"/>
+              <a:rPr lang="en-HU" dirty="0"/>
               <a:t>megfelelő folyadékfogyasztásra figyeljen</a:t>
             </a:r>
           </a:p>
           <a:p>
-            <a:endParaRPr lang="en-HU"/>
-          </a:p>
-          <a:p>
-            <a:r>
-              <a:rPr lang="en-HU"/>
+            <a:endParaRPr lang="en-HU" dirty="0"/>
+          </a:p>
+          <a:p>
+            <a:r>
+              <a:rPr lang="en-HU" dirty="0"/>
               <a:t>életmód, tréning, fehérjebevitel ugyanúgy fontos az izomvesztés elkerülésére</a:t>
             </a:r>
           </a:p>
@@ -4378,7 +4385,7 @@
           <a:lstStyle/>
           <a:p>
             <a:r>
-              <a:rPr lang="en-HU"/>
+              <a:rPr lang="en-HU" dirty="0"/>
               <a:t>Hatóanyagok</a:t>
             </a:r>
           </a:p>
